--- a/docs/slides/院长实验班AI教学系统_汇报.pptx
+++ b/docs/slides/院长实验班AI教学系统_汇报.pptx
@@ -7932,21 +7932,50 @@
                 <a:latin typeface="Segoe UI"/>
                 <a:ea typeface="微软雅黑"/>
               </a:rPr>
-              <a:t>183 个知识点、224 条依赖边在三维空间里展开</a:t>
+              <a:t>183 个知识点、224 条依赖边在三维空间里展开；点一个薄弱点按【根因回溯】，系统沿依赖边把整条链点亮并框住镜头</a:t>
             </a:r>
           </a:p>
         </p:txBody>
       </p:sp>
+      <p:pic>
+        <p:nvPicPr>
+          <p:cNvPr id="10" name="img10"/>
+          <p:cNvPicPr>
+            <a:picLocks noChangeAspect="1"/>
+          </p:cNvPicPr>
+          <p:nvPr/>
+        </p:nvPicPr>
+        <p:blipFill>
+          <a:blip r:embed="rId2"/>
+          <a:stretch>
+            <a:fillRect/>
+          </a:stretch>
+        </p:blipFill>
+        <p:spPr>
+          <a:xfrm>
+            <a:off x="2438913" y="1700000"/>
+            <a:ext cx="7314174" cy="4258000"/>
+          </a:xfrm>
+          <a:prstGeom prst="rect">
+            <a:avLst/>
+          </a:prstGeom>
+          <a:ln w="9525">
+            <a:solidFill>
+              <a:srgbClr val="D5DBE3"/>
+            </a:solidFill>
+          </a:ln>
+        </p:spPr>
+      </p:pic>
       <p:sp>
         <p:nvSpPr>
-          <p:cNvPr id="10" name="body"/>
+          <p:cNvPr id="11" name="body"/>
           <p:cNvSpPr txBox="1"/>
           <p:nvPr/>
         </p:nvSpPr>
         <p:spPr>
           <a:xfrm>
-            <a:off x="720000" y="1700000"/>
-            <a:ext cx="10752000" cy="4358000"/>
+            <a:off x="720000" y="6158000"/>
+            <a:ext cx="10752000" cy="-100000"/>
           </a:xfrm>
           <a:prstGeom prst="rect">
             <a:avLst/>
@@ -7970,24 +7999,14 @@
               <a:buChar char="▪"/>
             </a:pPr>
             <a:r>
-              <a:rPr lang="zh-CN" altLang="en-US" sz="1900" b="1" dirty="0">
+              <a:rPr lang="zh-CN" altLang="en-US" sz="1900" dirty="0">
                 <a:solidFill>
                   <a:srgbClr val="1B1F24"/>
                 </a:solidFill>
                 <a:latin typeface="Segoe UI"/>
                 <a:ea typeface="微软雅黑"/>
               </a:rPr>
-              <a:t>四种布局</a:t>
-            </a:r>
-            <a:r>
-              <a:rPr lang="zh-CN" altLang="en-US" sz="1900" dirty="0">
-                <a:solidFill>
-                  <a:srgbClr val="1B1F24"/>
-                </a:solidFill>
-                <a:latin typeface="Segoe UI"/>
-                <a:ea typeface="微软雅黑"/>
-              </a:rPr>
-              <a:t>：依赖分层（前置在下、后继在上）、章节星系、自由力导向、知识球面。</a:t>
+              <a:t>颜色 = 掌握度，球体大小 = 挡路度；琥珀色光环 = 该复习了，青绿描边 = 已验证掌握。</a:t>
             </a:r>
           </a:p>
           <a:p>
@@ -8002,6 +8021,16 @@
               <a:buChar char="▪"/>
             </a:pPr>
             <a:r>
+              <a:rPr lang="zh-CN" altLang="en-US" sz="1900" dirty="0">
+                <a:solidFill>
+                  <a:srgbClr val="1B1F24"/>
+                </a:solidFill>
+                <a:latin typeface="Segoe UI"/>
+                <a:ea typeface="微软雅黑"/>
+              </a:rPr>
+              <a:t>图中蓝色那条链就是根因回溯的结果：</a:t>
+            </a:r>
+            <a:r>
               <a:rPr lang="zh-CN" altLang="en-US" sz="1900" b="1" dirty="0">
                 <a:solidFill>
                   <a:srgbClr val="1B1F24"/>
@@ -8009,7 +8038,7 @@
                 <a:latin typeface="Segoe UI"/>
                 <a:ea typeface="微软雅黑"/>
               </a:rPr>
-              <a:t>颜色 = 掌握度，球体大小 = 挡路度</a:t>
+              <a:t>反向传播算法 ← … ← 线性回归模型形式</a:t>
             </a:r>
             <a:r>
               <a:rPr lang="zh-CN" altLang="en-US" sz="1900" dirty="0">
@@ -8019,142 +8048,14 @@
                 <a:latin typeface="Segoe UI"/>
                 <a:ea typeface="微软雅黑"/>
               </a:rPr>
-              <a:t>；与二维热力图同一套语言，不让两个视图各说各话。</a:t>
-            </a:r>
-          </a:p>
-          <a:p>
-            <a:pPr lvl="0" marL="320000" indent="-320000" algn="l">
-              <a:lnSpc>
-                <a:spcPct val="118000"/>
-              </a:lnSpc>
-              <a:spcBef>
-                <a:spcPts val="340"/>
-              </a:spcBef>
-              <a:buFont typeface="Arial"/>
-              <a:buChar char="▪"/>
-            </a:pPr>
-            <a:r>
-              <a:rPr lang="zh-CN" altLang="en-US" sz="1900" b="1" dirty="0">
-                <a:solidFill>
-                  <a:srgbClr val="1B1F24"/>
-                </a:solidFill>
-                <a:latin typeface="Segoe UI"/>
-                <a:ea typeface="微软雅黑"/>
-              </a:rPr>
-              <a:t>琥珀色脉冲光环 = 该复习了；青绿描边 = 已验证掌握；灰色 = 还没作答过。</a:t>
-            </a:r>
-          </a:p>
-          <a:p>
-            <a:pPr lvl="0" marL="320000" indent="-320000" algn="l">
-              <a:lnSpc>
-                <a:spcPct val="118000"/>
-              </a:lnSpc>
-              <a:spcBef>
-                <a:spcPts val="340"/>
-              </a:spcBef>
-              <a:buFont typeface="Arial"/>
-              <a:buChar char="▪"/>
-            </a:pPr>
-            <a:r>
-              <a:rPr lang="zh-CN" altLang="en-US" sz="1900" dirty="0">
-                <a:solidFill>
-                  <a:srgbClr val="1B1F24"/>
-                </a:solidFill>
-                <a:latin typeface="Segoe UI"/>
-                <a:ea typeface="微软雅黑"/>
-              </a:rPr>
-              <a:t>点一个薄弱点按【根因回溯】——系统沿依赖边把整条链点亮，并把镜头框到这条链上。</a:t>
-            </a:r>
-          </a:p>
-          <a:p>
-            <a:pPr lvl="1" marL="320000" indent="-320000" algn="l">
-              <a:lnSpc>
-                <a:spcPct val="118000"/>
-              </a:lnSpc>
-              <a:spcBef>
-                <a:spcPts val="340"/>
-              </a:spcBef>
-              <a:buFont typeface="Arial"/>
-              <a:buChar char="–"/>
-            </a:pPr>
-            <a:r>
-              <a:rPr lang="zh-CN" altLang="en-US" sz="1600" dirty="0">
-                <a:solidFill>
-                  <a:srgbClr val="4A5561"/>
-                </a:solidFill>
-                <a:latin typeface="Segoe UI"/>
-                <a:ea typeface="微软雅黑"/>
-              </a:rPr>
-              <a:t>诊断报告里那句「他不是反向传播不会，是链式法则没通」，在这里是</a:t>
-            </a:r>
-            <a:r>
-              <a:rPr lang="zh-CN" altLang="en-US" sz="1600" b="1" dirty="0">
-                <a:solidFill>
-                  <a:srgbClr val="4A5561"/>
-                </a:solidFill>
-                <a:latin typeface="Segoe UI"/>
-                <a:ea typeface="微软雅黑"/>
-              </a:rPr>
-              <a:t>看得见的一条光路</a:t>
-            </a:r>
-            <a:r>
-              <a:rPr lang="zh-CN" altLang="en-US" sz="1600" dirty="0">
-                <a:solidFill>
-                  <a:srgbClr val="4A5561"/>
-                </a:solidFill>
-                <a:latin typeface="Segoe UI"/>
-                <a:ea typeface="微软雅黑"/>
-              </a:rPr>
-              <a:t>；而且走的是同一个算法、同一份图谱结构。</a:t>
-            </a:r>
-          </a:p>
-          <a:p>
-            <a:pPr lvl="0" marL="320000" indent="-320000" algn="l">
-              <a:lnSpc>
-                <a:spcPct val="118000"/>
-              </a:lnSpc>
-              <a:spcBef>
-                <a:spcPts val="340"/>
-              </a:spcBef>
-              <a:buFont typeface="Arial"/>
-              <a:buChar char="▪"/>
-            </a:pPr>
-            <a:r>
-              <a:rPr lang="zh-CN" altLang="en-US" sz="1900" dirty="0">
-                <a:solidFill>
-                  <a:srgbClr val="1B1F24"/>
-                </a:solidFill>
-                <a:latin typeface="Segoe UI"/>
-                <a:ea typeface="微软雅黑"/>
-              </a:rPr>
-              <a:t>技术上：three.js </a:t>
-            </a:r>
-            <a:r>
-              <a:rPr lang="zh-CN" altLang="en-US" sz="1900" b="1" dirty="0">
-                <a:solidFill>
-                  <a:srgbClr val="1B1F24"/>
-                </a:solidFill>
-                <a:latin typeface="Segoe UI"/>
-                <a:ea typeface="微软雅黑"/>
-              </a:rPr>
-              <a:t>本地部署、不走 CDN、断网可用</a:t>
-            </a:r>
-            <a:r>
-              <a:rPr lang="zh-CN" altLang="en-US" sz="1900" dirty="0">
-                <a:solidFill>
-                  <a:srgbClr val="1B1F24"/>
-                </a:solidFill>
-                <a:latin typeface="Segoe UI"/>
-                <a:ea typeface="微软雅黑"/>
-              </a:rPr>
-              <a:t>；两个 draw call；500 节点单步 3.7 毫秒。</a:t>
+              <a:t>，与诊断报告走同一个算法、同一份图谱结构。</a:t>
             </a:r>
           </a:p>
         </p:txBody>
       </p:sp>
       <p:sp>
         <p:nvSpPr>
-          <p:cNvPr id="11" name="r11"/>
+          <p:cNvPr id="12" name="r12"/>
           <p:cNvSpPr/>
           <p:nvPr/>
         </p:nvSpPr>
@@ -8185,7 +8086,7 @@
       </p:sp>
       <p:sp>
         <p:nvSpPr>
-          <p:cNvPr id="12" name="note"/>
+          <p:cNvPr id="13" name="note"/>
           <p:cNvSpPr txBox="1"/>
           <p:nvPr/>
         </p:nvSpPr>

--- a/docs/slides/院长实验班AI教学系统_汇报.pptx
+++ b/docs/slides/院长实验班AI教学系统_汇报.pptx
@@ -17,6 +17,7 @@
     <p:sldId id="265" r:id="rId11"/>
     <p:sldId id="266" r:id="rId12"/>
     <p:sldId id="267" r:id="rId13"/>
+    <p:sldId id="268" r:id="rId14"/>
   </p:sldIdLst>
   <p:sldSz cx="12192000" cy="6858000"/>
   <p:notesSz cx="6858000" cy="12192000"/>
@@ -993,7 +994,7 @@
                 <a:latin typeface="Segoe UI"/>
                 <a:ea typeface="微软雅黑"/>
               </a:rPr>
-              <a:t>10 / 12</a:t>
+              <a:t>10 / 13</a:t>
             </a:r>
           </a:p>
         </p:txBody>
@@ -2091,7 +2092,7 @@
                 <a:latin typeface="Segoe UI"/>
                 <a:ea typeface="微软雅黑"/>
               </a:rPr>
-              <a:t>11 / 12</a:t>
+              <a:t>11 / 13</a:t>
             </a:r>
           </a:p>
         </p:txBody>
@@ -2191,7 +2192,7 @@
                 <a:latin typeface="Segoe UI"/>
                 <a:ea typeface="微软雅黑"/>
               </a:rPr>
-              <a:t>恳请各位拍板，以及下一步</a:t>
+              <a:t>教学大纲 → 课件：内容与渲染分离，用 OfficeCLI 兜底质量</a:t>
             </a:r>
           </a:p>
         </p:txBody>
@@ -2235,7 +2236,7 @@
                 <a:latin typeface="Segoe UI"/>
                 <a:ea typeface="微软雅黑"/>
               </a:rPr>
-              <a:t>参数已全部做成配置，但初值需要教学经验给定</a:t>
+              <a:t>延续第 5 页的铁律：大模型只管「说什么」，「渲染成什么格式」交给确定性工具</a:t>
             </a:r>
           </a:p>
         </p:txBody>
@@ -2248,15 +2249,16 @@
         </p:nvGraphicFramePr>
         <p:xfrm>
           <a:off x="720000" y="1700000"/>
-          <a:ext cx="10752000" cy="2400000"/>
+          <a:ext cx="10752000" cy="2000000"/>
         </p:xfrm>
         <a:graphic>
           <a:graphicData uri="http://schemas.openxmlformats.org/drawingml/2006/table">
             <a:tbl>
               <a:tblPr firstRow="1"/>
               <a:tblGrid>
-                <a:gridCol w="7751441"/>
-                <a:gridCol w="3000558"/>
+                <a:gridCol w="1911466"/>
+                <a:gridCol w="4061866"/>
+                <a:gridCol w="4778666"/>
               </a:tblGrid>
               <a:tr h="400000">
                 <a:tc>
@@ -2281,7 +2283,7 @@
                           <a:latin typeface="Segoe UI"/>
                           <a:ea typeface="微软雅黑"/>
                         </a:rPr>
-                        <a:t>需要各位定的</a:t>
+                        <a:t>维度</a:t>
                       </a:r>
                     </a:p>
                   </a:txBody>
@@ -2318,7 +2320,44 @@
                           <a:latin typeface="Segoe UI"/>
                           <a:ea typeface="微软雅黑"/>
                         </a:rPr>
-                        <a:t>当前初值</a:t>
+                        <a:t>大模型直接吐一份 PPT</a:t>
+                      </a:r>
+                    </a:p>
+                  </a:txBody>
+                  <a:tcPr marL="91440" marR="91440" marT="45720" marB="45720" anchor="ctr">
+                    <a:lnB w="6350">
+                      <a:solidFill>
+                        <a:srgbClr val="E5E7EB"/>
+                      </a:solidFill>
+                    </a:lnB>
+                    <a:solidFill>
+                      <a:srgbClr val="F2F5F9"/>
+                    </a:solidFill>
+                  </a:tcPr>
+                </a:tc>
+                <a:tc>
+                  <a:txBody>
+                    <a:bodyPr/>
+                    <a:lstStyle/>
+                    <a:p>
+                      <a:pPr lvl="0" marL="0" indent="0" algn="l">
+                        <a:lnSpc>
+                          <a:spcPct val="118000"/>
+                        </a:lnSpc>
+                        <a:spcBef>
+                          <a:spcPts val="0"/>
+                        </a:spcBef>
+                        <a:buNone/>
+                      </a:pPr>
+                      <a:r>
+                        <a:rPr lang="zh-CN" altLang="en-US" sz="1500" b="1" dirty="0">
+                          <a:solidFill>
+                            <a:srgbClr val="1B1F24"/>
+                          </a:solidFill>
+                          <a:latin typeface="Segoe UI"/>
+                          <a:ea typeface="微软雅黑"/>
+                        </a:rPr>
+                        <a:t>本系统的做法</a:t>
                       </a:r>
                     </a:p>
                   </a:txBody>
@@ -2357,7 +2396,7 @@
                           <a:latin typeface="Segoe UI"/>
                           <a:ea typeface="微软雅黑"/>
                         </a:rPr>
-                        <a:t>知识点拆到多细？一门课 300 还是 500 个？</a:t>
+                        <a:t>内容来源</a:t>
                       </a:r>
                     </a:p>
                   </a:txBody>
@@ -2394,7 +2433,44 @@
                           <a:latin typeface="Segoe UI"/>
                           <a:ea typeface="微软雅黑"/>
                         </a:rPr>
-                        <a:t>183（偏粗）</a:t>
+                        <a:t>模型编的图表数字，看着像真的</a:t>
+                      </a:r>
+                    </a:p>
+                  </a:txBody>
+                  <a:tcPr marL="91440" marR="91440" marT="45720" marB="45720" anchor="ctr">
+                    <a:lnB w="6350">
+                      <a:solidFill>
+                        <a:srgbClr val="E5E7EB"/>
+                      </a:solidFill>
+                    </a:lnB>
+                    <a:solidFill>
+                      <a:srgbClr val="FFFFFF"/>
+                    </a:solidFill>
+                  </a:tcPr>
+                </a:tc>
+                <a:tc>
+                  <a:txBody>
+                    <a:bodyPr/>
+                    <a:lstStyle/>
+                    <a:p>
+                      <a:pPr lvl="0" marL="0" indent="0" algn="l">
+                        <a:lnSpc>
+                          <a:spcPct val="118000"/>
+                        </a:lnSpc>
+                        <a:spcBef>
+                          <a:spcPts val="0"/>
+                        </a:spcBef>
+                        <a:buNone/>
+                      </a:pPr>
+                      <a:r>
+                        <a:rPr lang="zh-CN" altLang="en-US" sz="1500" dirty="0">
+                          <a:solidFill>
+                            <a:srgbClr val="333333"/>
+                          </a:solidFill>
+                          <a:latin typeface="Segoe UI"/>
+                          <a:ea typeface="微软雅黑"/>
+                        </a:rPr>
+                        <a:t>图表数据来自真实掌握度计算，可核对</a:t>
                       </a:r>
                     </a:p>
                   </a:txBody>
@@ -2426,14 +2502,14 @@
                         <a:buNone/>
                       </a:pPr>
                       <a:r>
-                        <a:rPr lang="zh-CN" altLang="en-US" sz="1500" b="1" dirty="0">
+                        <a:rPr lang="zh-CN" altLang="en-US" sz="1500" dirty="0">
                           <a:solidFill>
                             <a:srgbClr val="333333"/>
                           </a:solidFill>
                           <a:latin typeface="Segoe UI"/>
                           <a:ea typeface="微软雅黑"/>
                         </a:rPr>
-                        <a:t>诊断报告里最想第一时间看到哪几件事？</a:t>
+                        <a:t>版式一致性</a:t>
                       </a:r>
                     </a:p>
                   </a:txBody>
@@ -2470,7 +2546,44 @@
                           <a:latin typeface="Segoe UI"/>
                           <a:ea typeface="微软雅黑"/>
                         </a:rPr>
-                        <a:t>六项，可增删</a:t>
+                        <a:t>每次生成风格都不一样</a:t>
+                      </a:r>
+                    </a:p>
+                  </a:txBody>
+                  <a:tcPr marL="91440" marR="91440" marT="45720" marB="45720" anchor="ctr">
+                    <a:lnB w="6350">
+                      <a:solidFill>
+                        <a:srgbClr val="E5E7EB"/>
+                      </a:solidFill>
+                    </a:lnB>
+                    <a:solidFill>
+                      <a:srgbClr val="FFFFFF"/>
+                    </a:solidFill>
+                  </a:tcPr>
+                </a:tc>
+                <a:tc>
+                  <a:txBody>
+                    <a:bodyPr/>
+                    <a:lstStyle/>
+                    <a:p>
+                      <a:pPr lvl="0" marL="0" indent="0" algn="l">
+                        <a:lnSpc>
+                          <a:spcPct val="118000"/>
+                        </a:lnSpc>
+                        <a:spcBef>
+                          <a:spcPts val="0"/>
+                        </a:spcBef>
+                        <a:buNone/>
+                      </a:pPr>
+                      <a:r>
+                        <a:rPr lang="zh-CN" altLang="en-US" sz="1500" dirty="0">
+                          <a:solidFill>
+                            <a:srgbClr val="333333"/>
+                          </a:solidFill>
+                          <a:latin typeface="Segoe UI"/>
+                          <a:ea typeface="微软雅黑"/>
+                        </a:rPr>
+                        <a:t>固定 layout 模板，一门课全学期视觉统一</a:t>
                       </a:r>
                     </a:p>
                   </a:txBody>
@@ -2509,7 +2622,7 @@
                           <a:latin typeface="Segoe UI"/>
                           <a:ea typeface="微软雅黑"/>
                         </a:rPr>
-                        <a:t>掌握度低于多少判定「未掌握」；追问几次后降级</a:t>
+                        <a:t>知识点覆盖</a:t>
                       </a:r>
                     </a:p>
                   </a:txBody>
@@ -2546,7 +2659,44 @@
                           <a:latin typeface="Segoe UI"/>
                           <a:ea typeface="微软雅黑"/>
                         </a:rPr>
-                        <a:t>0.75；3 次</a:t>
+                        <a:t>覆盖了多少全凭运气</a:t>
+                      </a:r>
+                    </a:p>
+                  </a:txBody>
+                  <a:tcPr marL="91440" marR="91440" marT="45720" marB="45720" anchor="ctr">
+                    <a:lnB w="6350">
+                      <a:solidFill>
+                        <a:srgbClr val="E5E7EB"/>
+                      </a:solidFill>
+                    </a:lnB>
+                    <a:solidFill>
+                      <a:srgbClr val="FFFFFF"/>
+                    </a:solidFill>
+                  </a:tcPr>
+                </a:tc>
+                <a:tc>
+                  <a:txBody>
+                    <a:bodyPr/>
+                    <a:lstStyle/>
+                    <a:p>
+                      <a:pPr lvl="0" marL="0" indent="0" algn="l">
+                        <a:lnSpc>
+                          <a:spcPct val="118000"/>
+                        </a:lnSpc>
+                        <a:spcBef>
+                          <a:spcPts val="0"/>
+                        </a:spcBef>
+                        <a:buNone/>
+                      </a:pPr>
+                      <a:r>
+                        <a:rPr lang="zh-CN" altLang="en-US" sz="1500" dirty="0">
+                          <a:solidFill>
+                            <a:srgbClr val="333333"/>
+                          </a:solidFill>
+                          <a:latin typeface="Segoe UI"/>
+                          <a:ea typeface="微软雅黑"/>
+                        </a:rPr>
+                        <a:t>DeckPlan.kp_coverage() 机器校验，缺了会提示</a:t>
                       </a:r>
                     </a:p>
                   </a:txBody>
@@ -2578,14 +2728,14 @@
                         <a:buNone/>
                       </a:pPr>
                       <a:r>
-                        <a:rPr lang="zh-CN" altLang="en-US" sz="1500" b="1" dirty="0">
+                        <a:rPr lang="zh-CN" altLang="en-US" sz="1500" dirty="0">
                           <a:solidFill>
                             <a:srgbClr val="333333"/>
                           </a:solidFill>
                           <a:latin typeface="Segoe UI"/>
                           <a:ea typeface="微软雅黑"/>
                         </a:rPr>
-                        <a:t>两次做对相隔多少天才算「已验证掌握」</a:t>
+                        <a:t>工具不可用时</a:t>
                       </a:r>
                     </a:p>
                   </a:txBody>
@@ -2622,7 +2772,7 @@
                           <a:latin typeface="Segoe UI"/>
                           <a:ea typeface="微软雅黑"/>
                         </a:rPr>
-                        <a:t>7 天</a:t>
+                        <a:t>整个功能瘫痪</a:t>
                       </a:r>
                     </a:p>
                   </a:txBody>
@@ -2637,8 +2787,6 @@
                     </a:solidFill>
                   </a:tcPr>
                 </a:tc>
-              </a:tr>
-              <a:tr h="400000">
                 <a:tc>
                   <a:txBody>
                     <a:bodyPr/>
@@ -2661,44 +2809,7 @@
                           <a:latin typeface="Segoe UI"/>
                           <a:ea typeface="微软雅黑"/>
                         </a:rPr>
-                        <a:t>指导项目时，你凭哪些迹象判断一个学生真的懂了？</a:t>
-                      </a:r>
-                    </a:p>
-                  </a:txBody>
-                  <a:tcPr marL="91440" marR="91440" marT="45720" marB="45720" anchor="ctr">
-                    <a:lnB w="6350">
-                      <a:solidFill>
-                        <a:srgbClr val="E5E7EB"/>
-                      </a:solidFill>
-                    </a:lnB>
-                    <a:solidFill>
-                      <a:srgbClr val="FFFFFF"/>
-                    </a:solidFill>
-                  </a:tcPr>
-                </a:tc>
-                <a:tc>
-                  <a:txBody>
-                    <a:bodyPr/>
-                    <a:lstStyle/>
-                    <a:p>
-                      <a:pPr lvl="0" marL="0" indent="0" algn="l">
-                        <a:lnSpc>
-                          <a:spcPct val="118000"/>
-                        </a:lnSpc>
-                        <a:spcBef>
-                          <a:spcPts val="0"/>
-                        </a:spcBef>
-                        <a:buNone/>
-                      </a:pPr>
-                      <a:r>
-                        <a:rPr lang="zh-CN" altLang="en-US" sz="1500" dirty="0">
-                          <a:solidFill>
-                            <a:srgbClr val="333333"/>
-                          </a:solidFill>
-                          <a:latin typeface="Segoe UI"/>
-                          <a:ea typeface="微软雅黑"/>
-                        </a:rPr>
-                        <a:t>待各位给出</a:t>
+                        <a:t>自动降级到内建引擎，教师永远拿到能打开的 pptx</a:t>
                       </a:r>
                     </a:p>
                   </a:txBody>
@@ -2726,8 +2837,8 @@
         </p:nvSpPr>
         <p:spPr>
           <a:xfrm>
-            <a:off x="720000" y="4360000"/>
-            <a:ext cx="10752000" cy="1698000"/>
+            <a:off x="720000" y="3960000"/>
+            <a:ext cx="10752000" cy="2098000"/>
           </a:xfrm>
           <a:prstGeom prst="rect">
             <a:avLst/>
@@ -2751,6 +2862,16 @@
               <a:buChar char="▪"/>
             </a:pPr>
             <a:r>
+              <a:rPr lang="zh-CN" altLang="en-US" sz="1900" dirty="0">
+                <a:solidFill>
+                  <a:srgbClr val="1B1F24"/>
+                </a:solidFill>
+                <a:latin typeface="Segoe UI"/>
+                <a:ea typeface="微软雅黑"/>
+              </a:rPr>
+              <a:t>渲染引擎用的是 </a:t>
+            </a:r>
+            <a:r>
               <a:rPr lang="zh-CN" altLang="en-US" sz="1900" b="1" dirty="0">
                 <a:solidFill>
                   <a:srgbClr val="1B1F24"/>
@@ -2758,7 +2879,7 @@
                 <a:latin typeface="Segoe UI"/>
                 <a:ea typeface="微软雅黑"/>
               </a:rPr>
-              <a:t>近期</a:t>
+              <a:t>OfficeCLI</a:t>
             </a:r>
             <a:r>
               <a:rPr lang="zh-CN" altLang="en-US" sz="1900" dirty="0">
@@ -2768,7 +2889,27 @@
                 <a:latin typeface="Segoe UI"/>
                 <a:ea typeface="微软雅黑"/>
               </a:rPr>
-              <a:t>：试点课程知识点细化到 300–500 个；接入第一门课的真实作业数据；首批 2 个项目的任务-知识点映射由导师确认。</a:t>
+              <a:t>（Apache 2.0，26.9k star、6000+ 次提交，自研 OOXML 渲染引擎，本身不调用任何大模型、不需要 API Key）——它和我们第 5 页的判断完全一致：</a:t>
+            </a:r>
+            <a:r>
+              <a:rPr lang="zh-CN" altLang="en-US" sz="1900" b="1" dirty="0">
+                <a:solidFill>
+                  <a:srgbClr val="1B1F24"/>
+                </a:solidFill>
+                <a:latin typeface="Segoe UI"/>
+                <a:ea typeface="微软雅黑"/>
+              </a:rPr>
+              <a:t>渲染是「嘴」，可以换；内容是「脑」，不能瞎编</a:t>
+            </a:r>
+            <a:r>
+              <a:rPr lang="zh-CN" altLang="en-US" sz="1900" dirty="0">
+                <a:solidFill>
+                  <a:srgbClr val="1B1F24"/>
+                </a:solidFill>
+                <a:latin typeface="Segoe UI"/>
+                <a:ea typeface="微软雅黑"/>
+              </a:rPr>
+              <a:t>。</a:t>
             </a:r>
           </a:p>
           <a:p>
@@ -2783,6 +2924,16 @@
               <a:buChar char="▪"/>
             </a:pPr>
             <a:r>
+              <a:rPr lang="zh-CN" altLang="en-US" sz="1900" dirty="0">
+                <a:solidFill>
+                  <a:srgbClr val="1B1F24"/>
+                </a:solidFill>
+                <a:latin typeface="Segoe UI"/>
+                <a:ea typeface="微软雅黑"/>
+              </a:rPr>
+              <a:t>它的 dump/merge 模板范式给了我们一个思路：版式只设计一次，以后每次课的课件都是往同一份模板里填内容——这是</a:t>
+            </a:r>
+            <a:r>
               <a:rPr lang="zh-CN" altLang="en-US" sz="1900" b="1" dirty="0">
                 <a:solidFill>
                   <a:srgbClr val="1B1F24"/>
@@ -2790,7 +2941,7 @@
                 <a:latin typeface="Segoe UI"/>
                 <a:ea typeface="微软雅黑"/>
               </a:rPr>
-              <a:t>战略</a:t>
+              <a:t>下一步</a:t>
             </a:r>
             <a:r>
               <a:rPr lang="zh-CN" altLang="en-US" sz="1900" dirty="0">
@@ -2800,49 +2951,7 @@
                 <a:latin typeface="Segoe UI"/>
                 <a:ea typeface="微软雅黑"/>
               </a:rPr>
-              <a:t>：全球仅极少数教学系统有随机对照试验级证据，中文工科场景近乎空白。从现在起按可发表标准采集——实验班 vs 对照组，</a:t>
-            </a:r>
-            <a:r>
-              <a:rPr lang="zh-CN" altLang="en-US" sz="1900" b="1" dirty="0">
-                <a:solidFill>
-                  <a:srgbClr val="1B1F24"/>
-                </a:solidFill>
-                <a:latin typeface="Segoe UI"/>
-                <a:ea typeface="微软雅黑"/>
-              </a:rPr>
-              <a:t>延迟后测</a:t>
-            </a:r>
-            <a:r>
-              <a:rPr lang="zh-CN" altLang="en-US" sz="1900" dirty="0">
-                <a:solidFill>
-                  <a:srgbClr val="1B1F24"/>
-                </a:solidFill>
-                <a:latin typeface="Segoe UI"/>
-                <a:ea typeface="微软雅黑"/>
-              </a:rPr>
-              <a:t>作主指标。</a:t>
-            </a:r>
-          </a:p>
-          <a:p>
-            <a:pPr lvl="1" marL="320000" indent="-320000" algn="l">
-              <a:lnSpc>
-                <a:spcPct val="118000"/>
-              </a:lnSpc>
-              <a:spcBef>
-                <a:spcPts val="340"/>
-              </a:spcBef>
-              <a:buFont typeface="Arial"/>
-              <a:buChar char="–"/>
-            </a:pPr>
-            <a:r>
-              <a:rPr lang="zh-CN" altLang="en-US" sz="1600" dirty="0">
-                <a:solidFill>
-                  <a:srgbClr val="4A5561"/>
-                </a:solidFill>
-                <a:latin typeface="Segoe UI"/>
-                <a:ea typeface="微软雅黑"/>
-              </a:rPr>
-              <a:t>第 2 页右边那个「1–2 σ」，要靠这件事从理论上限变成本班的实测数字。</a:t>
+              <a:t>要吸收的部分。</a:t>
             </a:r>
           </a:p>
         </p:txBody>
@@ -2917,7 +3026,7 @@
                 <a:latin typeface="Segoe UI"/>
                 <a:ea typeface="微软雅黑"/>
               </a:rPr>
-              <a:t>评测指标的选择本身就是架构决策：主指标必须是延迟后测与迁移任务，不能是当场正确率——否则会训练出让学生越学越弱的系统。</a:t>
+              <a:t>渲染工具版本号会记进产物记录（呼应第 5 页「可积累资产不依赖可替换实现，换底座须留痕」）——今天用 OfficeCLI，明天换渲染引擎，历史课件仍可追溯、可重渲染。</a:t>
             </a:r>
           </a:p>
         </p:txBody>
@@ -2961,7 +3070,877 @@
                 <a:latin typeface="Segoe UI"/>
                 <a:ea typeface="微软雅黑"/>
               </a:rPr>
-              <a:t>12 / 12</a:t>
+              <a:t>12 / 13</a:t>
+            </a:r>
+          </a:p>
+        </p:txBody>
+      </p:sp>
+    </p:spTree>
+  </p:cSld>
+  <p:clrMapOvr>
+    <a:overrideClrMapping bg1="lt1" tx1="dk1" bg2="lt2" tx2="dk2" accent1="accent1" accent2="accent2" accent3="accent3" accent4="accent4" accent5="accent5" accent6="accent6" hlink="hlink" folHlink="folHlink"/>
+  </p:clrMapOvr>
+</p:sld>
+</file>
+
+<file path=ppt/slides/slide13.xml><?xml version="1.0" encoding="utf-8"?>
+<p:sld xmlns:a="http://schemas.openxmlformats.org/drawingml/2006/main" xmlns:r="http://schemas.openxmlformats.org/officeDocument/2006/relationships" xmlns:p="http://schemas.openxmlformats.org/presentationml/2006/main">
+  <p:cSld>
+    <p:spTree>
+      <p:nvGrpSpPr>
+        <p:cNvPr id="1" name=""/>
+        <p:cNvGrpSpPr/>
+        <p:nvPr/>
+      </p:nvGrpSpPr>
+      <p:grpSpPr>
+        <a:xfrm>
+          <a:off x="0" y="0"/>
+          <a:ext cx="0" cy="0"/>
+          <a:chOff x="0" y="0"/>
+          <a:chExt cx="0" cy="0"/>
+        </a:xfrm>
+      </p:grpSpPr>
+      <p:sp>
+        <p:nvSpPr>
+          <p:cNvPr id="2" name="r2"/>
+          <p:cNvSpPr/>
+          <p:nvPr/>
+        </p:nvSpPr>
+        <p:spPr>
+          <a:xfrm>
+            <a:off x="720000" y="660000"/>
+            <a:ext cx="90000" cy="420000"/>
+          </a:xfrm>
+          <a:prstGeom prst="roundRect">
+            <a:avLst>
+              <a:gd name="adj" fmla="val 6000"/>
+            </a:avLst>
+          </a:prstGeom>
+          <a:solidFill>
+            <a:srgbClr val="1F6FEB">
+              <a:alpha val="100000"/>
+            </a:srgbClr>
+          </a:solidFill>
+          <a:ln>
+            <a:noFill/>
+          </a:ln>
+        </p:spPr>
+        <p:txBody>
+          <a:bodyPr/>
+          <a:lstStyle/>
+          <a:p/>
+        </p:txBody>
+      </p:sp>
+      <p:sp>
+        <p:nvSpPr>
+          <p:cNvPr id="3" name="title"/>
+          <p:cNvSpPr txBox="1"/>
+          <p:nvPr/>
+        </p:nvSpPr>
+        <p:spPr>
+          <a:xfrm>
+            <a:off x="940000" y="620000"/>
+            <a:ext cx="10752000" cy="620000"/>
+          </a:xfrm>
+          <a:prstGeom prst="rect">
+            <a:avLst/>
+          </a:prstGeom>
+          <a:noFill/>
+        </p:spPr>
+        <p:txBody>
+          <a:bodyPr wrap="square" anchor="t">
+            <a:normAutofit/>
+          </a:bodyPr>
+          <a:lstStyle/>
+          <a:p>
+            <a:pPr lvl="0" marL="0" indent="0" algn="l">
+              <a:lnSpc>
+                <a:spcPct val="118000"/>
+              </a:lnSpc>
+              <a:spcBef>
+                <a:spcPts val="0"/>
+              </a:spcBef>
+              <a:buNone/>
+            </a:pPr>
+            <a:r>
+              <a:rPr lang="zh-CN" altLang="en-US" sz="2700" b="1" dirty="0">
+                <a:solidFill>
+                  <a:srgbClr val="1B1F24"/>
+                </a:solidFill>
+                <a:latin typeface="Segoe UI"/>
+                <a:ea typeface="微软雅黑"/>
+              </a:rPr>
+              <a:t>恳请各位拍板，以及下一步</a:t>
+            </a:r>
+          </a:p>
+        </p:txBody>
+      </p:sp>
+      <p:sp>
+        <p:nvSpPr>
+          <p:cNvPr id="4" name="sub"/>
+          <p:cNvSpPr txBox="1"/>
+          <p:nvPr/>
+        </p:nvSpPr>
+        <p:spPr>
+          <a:xfrm>
+            <a:off x="940000" y="1180000"/>
+            <a:ext cx="10752000" cy="460000"/>
+          </a:xfrm>
+          <a:prstGeom prst="rect">
+            <a:avLst/>
+          </a:prstGeom>
+          <a:noFill/>
+        </p:spPr>
+        <p:txBody>
+          <a:bodyPr wrap="square" anchor="t">
+            <a:normAutofit/>
+          </a:bodyPr>
+          <a:lstStyle/>
+          <a:p>
+            <a:pPr lvl="0" marL="0" indent="0" algn="l">
+              <a:lnSpc>
+                <a:spcPct val="118000"/>
+              </a:lnSpc>
+              <a:spcBef>
+                <a:spcPts val="0"/>
+              </a:spcBef>
+              <a:buNone/>
+            </a:pPr>
+            <a:r>
+              <a:rPr lang="zh-CN" altLang="en-US" sz="1500" dirty="0">
+                <a:solidFill>
+                  <a:srgbClr val="6B7280"/>
+                </a:solidFill>
+                <a:latin typeface="Segoe UI"/>
+                <a:ea typeface="微软雅黑"/>
+              </a:rPr>
+              <a:t>参数已全部做成配置，但初值需要教学经验给定</a:t>
+            </a:r>
+          </a:p>
+        </p:txBody>
+      </p:sp>
+      <p:graphicFrame>
+        <p:nvGraphicFramePr>
+          <p:cNvPr id="10" name="t10"/>
+          <p:cNvGraphicFramePr/>
+          <p:nvPr/>
+        </p:nvGraphicFramePr>
+        <p:xfrm>
+          <a:off x="720000" y="1700000"/>
+          <a:ext cx="10752000" cy="2400000"/>
+        </p:xfrm>
+        <a:graphic>
+          <a:graphicData uri="http://schemas.openxmlformats.org/drawingml/2006/table">
+            <a:tbl>
+              <a:tblPr firstRow="1"/>
+              <a:tblGrid>
+                <a:gridCol w="7751441"/>
+                <a:gridCol w="3000558"/>
+              </a:tblGrid>
+              <a:tr h="400000">
+                <a:tc>
+                  <a:txBody>
+                    <a:bodyPr/>
+                    <a:lstStyle/>
+                    <a:p>
+                      <a:pPr lvl="0" marL="0" indent="0" algn="l">
+                        <a:lnSpc>
+                          <a:spcPct val="118000"/>
+                        </a:lnSpc>
+                        <a:spcBef>
+                          <a:spcPts val="0"/>
+                        </a:spcBef>
+                        <a:buNone/>
+                      </a:pPr>
+                      <a:r>
+                        <a:rPr lang="zh-CN" altLang="en-US" sz="1500" b="1" dirty="0">
+                          <a:solidFill>
+                            <a:srgbClr val="1B1F24"/>
+                          </a:solidFill>
+                          <a:latin typeface="Segoe UI"/>
+                          <a:ea typeface="微软雅黑"/>
+                        </a:rPr>
+                        <a:t>需要各位定的</a:t>
+                      </a:r>
+                    </a:p>
+                  </a:txBody>
+                  <a:tcPr marL="91440" marR="91440" marT="45720" marB="45720" anchor="ctr">
+                    <a:lnB w="6350">
+                      <a:solidFill>
+                        <a:srgbClr val="E5E7EB"/>
+                      </a:solidFill>
+                    </a:lnB>
+                    <a:solidFill>
+                      <a:srgbClr val="F2F5F9"/>
+                    </a:solidFill>
+                  </a:tcPr>
+                </a:tc>
+                <a:tc>
+                  <a:txBody>
+                    <a:bodyPr/>
+                    <a:lstStyle/>
+                    <a:p>
+                      <a:pPr lvl="0" marL="0" indent="0" algn="l">
+                        <a:lnSpc>
+                          <a:spcPct val="118000"/>
+                        </a:lnSpc>
+                        <a:spcBef>
+                          <a:spcPts val="0"/>
+                        </a:spcBef>
+                        <a:buNone/>
+                      </a:pPr>
+                      <a:r>
+                        <a:rPr lang="zh-CN" altLang="en-US" sz="1500" b="1" dirty="0">
+                          <a:solidFill>
+                            <a:srgbClr val="1B1F24"/>
+                          </a:solidFill>
+                          <a:latin typeface="Segoe UI"/>
+                          <a:ea typeface="微软雅黑"/>
+                        </a:rPr>
+                        <a:t>当前初值</a:t>
+                      </a:r>
+                    </a:p>
+                  </a:txBody>
+                  <a:tcPr marL="91440" marR="91440" marT="45720" marB="45720" anchor="ctr">
+                    <a:lnB w="6350">
+                      <a:solidFill>
+                        <a:srgbClr val="E5E7EB"/>
+                      </a:solidFill>
+                    </a:lnB>
+                    <a:solidFill>
+                      <a:srgbClr val="F2F5F9"/>
+                    </a:solidFill>
+                  </a:tcPr>
+                </a:tc>
+              </a:tr>
+              <a:tr h="400000">
+                <a:tc>
+                  <a:txBody>
+                    <a:bodyPr/>
+                    <a:lstStyle/>
+                    <a:p>
+                      <a:pPr lvl="0" marL="0" indent="0" algn="l">
+                        <a:lnSpc>
+                          <a:spcPct val="118000"/>
+                        </a:lnSpc>
+                        <a:spcBef>
+                          <a:spcPts val="0"/>
+                        </a:spcBef>
+                        <a:buNone/>
+                      </a:pPr>
+                      <a:r>
+                        <a:rPr lang="zh-CN" altLang="en-US" sz="1500" dirty="0">
+                          <a:solidFill>
+                            <a:srgbClr val="333333"/>
+                          </a:solidFill>
+                          <a:latin typeface="Segoe UI"/>
+                          <a:ea typeface="微软雅黑"/>
+                        </a:rPr>
+                        <a:t>知识点拆到多细？一门课 300 还是 500 个？</a:t>
+                      </a:r>
+                    </a:p>
+                  </a:txBody>
+                  <a:tcPr marL="91440" marR="91440" marT="45720" marB="45720" anchor="ctr">
+                    <a:lnB w="6350">
+                      <a:solidFill>
+                        <a:srgbClr val="E5E7EB"/>
+                      </a:solidFill>
+                    </a:lnB>
+                    <a:solidFill>
+                      <a:srgbClr val="FFFFFF"/>
+                    </a:solidFill>
+                  </a:tcPr>
+                </a:tc>
+                <a:tc>
+                  <a:txBody>
+                    <a:bodyPr/>
+                    <a:lstStyle/>
+                    <a:p>
+                      <a:pPr lvl="0" marL="0" indent="0" algn="l">
+                        <a:lnSpc>
+                          <a:spcPct val="118000"/>
+                        </a:lnSpc>
+                        <a:spcBef>
+                          <a:spcPts val="0"/>
+                        </a:spcBef>
+                        <a:buNone/>
+                      </a:pPr>
+                      <a:r>
+                        <a:rPr lang="zh-CN" altLang="en-US" sz="1500" dirty="0">
+                          <a:solidFill>
+                            <a:srgbClr val="333333"/>
+                          </a:solidFill>
+                          <a:latin typeface="Segoe UI"/>
+                          <a:ea typeface="微软雅黑"/>
+                        </a:rPr>
+                        <a:t>183（偏粗）</a:t>
+                      </a:r>
+                    </a:p>
+                  </a:txBody>
+                  <a:tcPr marL="91440" marR="91440" marT="45720" marB="45720" anchor="ctr">
+                    <a:lnB w="6350">
+                      <a:solidFill>
+                        <a:srgbClr val="E5E7EB"/>
+                      </a:solidFill>
+                    </a:lnB>
+                    <a:solidFill>
+                      <a:srgbClr val="FFFFFF"/>
+                    </a:solidFill>
+                  </a:tcPr>
+                </a:tc>
+              </a:tr>
+              <a:tr h="400000">
+                <a:tc>
+                  <a:txBody>
+                    <a:bodyPr/>
+                    <a:lstStyle/>
+                    <a:p>
+                      <a:pPr lvl="0" marL="0" indent="0" algn="l">
+                        <a:lnSpc>
+                          <a:spcPct val="118000"/>
+                        </a:lnSpc>
+                        <a:spcBef>
+                          <a:spcPts val="0"/>
+                        </a:spcBef>
+                        <a:buNone/>
+                      </a:pPr>
+                      <a:r>
+                        <a:rPr lang="zh-CN" altLang="en-US" sz="1500" b="1" dirty="0">
+                          <a:solidFill>
+                            <a:srgbClr val="333333"/>
+                          </a:solidFill>
+                          <a:latin typeface="Segoe UI"/>
+                          <a:ea typeface="微软雅黑"/>
+                        </a:rPr>
+                        <a:t>诊断报告里最想第一时间看到哪几件事？</a:t>
+                      </a:r>
+                    </a:p>
+                  </a:txBody>
+                  <a:tcPr marL="91440" marR="91440" marT="45720" marB="45720" anchor="ctr">
+                    <a:lnB w="6350">
+                      <a:solidFill>
+                        <a:srgbClr val="E5E7EB"/>
+                      </a:solidFill>
+                    </a:lnB>
+                    <a:solidFill>
+                      <a:srgbClr val="FFFFFF"/>
+                    </a:solidFill>
+                  </a:tcPr>
+                </a:tc>
+                <a:tc>
+                  <a:txBody>
+                    <a:bodyPr/>
+                    <a:lstStyle/>
+                    <a:p>
+                      <a:pPr lvl="0" marL="0" indent="0" algn="l">
+                        <a:lnSpc>
+                          <a:spcPct val="118000"/>
+                        </a:lnSpc>
+                        <a:spcBef>
+                          <a:spcPts val="0"/>
+                        </a:spcBef>
+                        <a:buNone/>
+                      </a:pPr>
+                      <a:r>
+                        <a:rPr lang="zh-CN" altLang="en-US" sz="1500" dirty="0">
+                          <a:solidFill>
+                            <a:srgbClr val="333333"/>
+                          </a:solidFill>
+                          <a:latin typeface="Segoe UI"/>
+                          <a:ea typeface="微软雅黑"/>
+                        </a:rPr>
+                        <a:t>六项，可增删</a:t>
+                      </a:r>
+                    </a:p>
+                  </a:txBody>
+                  <a:tcPr marL="91440" marR="91440" marT="45720" marB="45720" anchor="ctr">
+                    <a:lnB w="6350">
+                      <a:solidFill>
+                        <a:srgbClr val="E5E7EB"/>
+                      </a:solidFill>
+                    </a:lnB>
+                    <a:solidFill>
+                      <a:srgbClr val="FFFFFF"/>
+                    </a:solidFill>
+                  </a:tcPr>
+                </a:tc>
+              </a:tr>
+              <a:tr h="400000">
+                <a:tc>
+                  <a:txBody>
+                    <a:bodyPr/>
+                    <a:lstStyle/>
+                    <a:p>
+                      <a:pPr lvl="0" marL="0" indent="0" algn="l">
+                        <a:lnSpc>
+                          <a:spcPct val="118000"/>
+                        </a:lnSpc>
+                        <a:spcBef>
+                          <a:spcPts val="0"/>
+                        </a:spcBef>
+                        <a:buNone/>
+                      </a:pPr>
+                      <a:r>
+                        <a:rPr lang="zh-CN" altLang="en-US" sz="1500" dirty="0">
+                          <a:solidFill>
+                            <a:srgbClr val="333333"/>
+                          </a:solidFill>
+                          <a:latin typeface="Segoe UI"/>
+                          <a:ea typeface="微软雅黑"/>
+                        </a:rPr>
+                        <a:t>掌握度低于多少判定「未掌握」；追问几次后降级</a:t>
+                      </a:r>
+                    </a:p>
+                  </a:txBody>
+                  <a:tcPr marL="91440" marR="91440" marT="45720" marB="45720" anchor="ctr">
+                    <a:lnB w="6350">
+                      <a:solidFill>
+                        <a:srgbClr val="E5E7EB"/>
+                      </a:solidFill>
+                    </a:lnB>
+                    <a:solidFill>
+                      <a:srgbClr val="FFFFFF"/>
+                    </a:solidFill>
+                  </a:tcPr>
+                </a:tc>
+                <a:tc>
+                  <a:txBody>
+                    <a:bodyPr/>
+                    <a:lstStyle/>
+                    <a:p>
+                      <a:pPr lvl="0" marL="0" indent="0" algn="l">
+                        <a:lnSpc>
+                          <a:spcPct val="118000"/>
+                        </a:lnSpc>
+                        <a:spcBef>
+                          <a:spcPts val="0"/>
+                        </a:spcBef>
+                        <a:buNone/>
+                      </a:pPr>
+                      <a:r>
+                        <a:rPr lang="zh-CN" altLang="en-US" sz="1500" dirty="0">
+                          <a:solidFill>
+                            <a:srgbClr val="333333"/>
+                          </a:solidFill>
+                          <a:latin typeface="Segoe UI"/>
+                          <a:ea typeface="微软雅黑"/>
+                        </a:rPr>
+                        <a:t>0.75；3 次</a:t>
+                      </a:r>
+                    </a:p>
+                  </a:txBody>
+                  <a:tcPr marL="91440" marR="91440" marT="45720" marB="45720" anchor="ctr">
+                    <a:lnB w="6350">
+                      <a:solidFill>
+                        <a:srgbClr val="E5E7EB"/>
+                      </a:solidFill>
+                    </a:lnB>
+                    <a:solidFill>
+                      <a:srgbClr val="FFFFFF"/>
+                    </a:solidFill>
+                  </a:tcPr>
+                </a:tc>
+              </a:tr>
+              <a:tr h="400000">
+                <a:tc>
+                  <a:txBody>
+                    <a:bodyPr/>
+                    <a:lstStyle/>
+                    <a:p>
+                      <a:pPr lvl="0" marL="0" indent="0" algn="l">
+                        <a:lnSpc>
+                          <a:spcPct val="118000"/>
+                        </a:lnSpc>
+                        <a:spcBef>
+                          <a:spcPts val="0"/>
+                        </a:spcBef>
+                        <a:buNone/>
+                      </a:pPr>
+                      <a:r>
+                        <a:rPr lang="zh-CN" altLang="en-US" sz="1500" b="1" dirty="0">
+                          <a:solidFill>
+                            <a:srgbClr val="333333"/>
+                          </a:solidFill>
+                          <a:latin typeface="Segoe UI"/>
+                          <a:ea typeface="微软雅黑"/>
+                        </a:rPr>
+                        <a:t>两次做对相隔多少天才算「已验证掌握」</a:t>
+                      </a:r>
+                    </a:p>
+                  </a:txBody>
+                  <a:tcPr marL="91440" marR="91440" marT="45720" marB="45720" anchor="ctr">
+                    <a:lnB w="6350">
+                      <a:solidFill>
+                        <a:srgbClr val="E5E7EB"/>
+                      </a:solidFill>
+                    </a:lnB>
+                    <a:solidFill>
+                      <a:srgbClr val="FFFFFF"/>
+                    </a:solidFill>
+                  </a:tcPr>
+                </a:tc>
+                <a:tc>
+                  <a:txBody>
+                    <a:bodyPr/>
+                    <a:lstStyle/>
+                    <a:p>
+                      <a:pPr lvl="0" marL="0" indent="0" algn="l">
+                        <a:lnSpc>
+                          <a:spcPct val="118000"/>
+                        </a:lnSpc>
+                        <a:spcBef>
+                          <a:spcPts val="0"/>
+                        </a:spcBef>
+                        <a:buNone/>
+                      </a:pPr>
+                      <a:r>
+                        <a:rPr lang="zh-CN" altLang="en-US" sz="1500" dirty="0">
+                          <a:solidFill>
+                            <a:srgbClr val="333333"/>
+                          </a:solidFill>
+                          <a:latin typeface="Segoe UI"/>
+                          <a:ea typeface="微软雅黑"/>
+                        </a:rPr>
+                        <a:t>7 天</a:t>
+                      </a:r>
+                    </a:p>
+                  </a:txBody>
+                  <a:tcPr marL="91440" marR="91440" marT="45720" marB="45720" anchor="ctr">
+                    <a:lnB w="6350">
+                      <a:solidFill>
+                        <a:srgbClr val="E5E7EB"/>
+                      </a:solidFill>
+                    </a:lnB>
+                    <a:solidFill>
+                      <a:srgbClr val="FFFFFF"/>
+                    </a:solidFill>
+                  </a:tcPr>
+                </a:tc>
+              </a:tr>
+              <a:tr h="400000">
+                <a:tc>
+                  <a:txBody>
+                    <a:bodyPr/>
+                    <a:lstStyle/>
+                    <a:p>
+                      <a:pPr lvl="0" marL="0" indent="0" algn="l">
+                        <a:lnSpc>
+                          <a:spcPct val="118000"/>
+                        </a:lnSpc>
+                        <a:spcBef>
+                          <a:spcPts val="0"/>
+                        </a:spcBef>
+                        <a:buNone/>
+                      </a:pPr>
+                      <a:r>
+                        <a:rPr lang="zh-CN" altLang="en-US" sz="1500" dirty="0">
+                          <a:solidFill>
+                            <a:srgbClr val="333333"/>
+                          </a:solidFill>
+                          <a:latin typeface="Segoe UI"/>
+                          <a:ea typeface="微软雅黑"/>
+                        </a:rPr>
+                        <a:t>指导项目时，你凭哪些迹象判断一个学生真的懂了？</a:t>
+                      </a:r>
+                    </a:p>
+                  </a:txBody>
+                  <a:tcPr marL="91440" marR="91440" marT="45720" marB="45720" anchor="ctr">
+                    <a:lnB w="6350">
+                      <a:solidFill>
+                        <a:srgbClr val="E5E7EB"/>
+                      </a:solidFill>
+                    </a:lnB>
+                    <a:solidFill>
+                      <a:srgbClr val="FFFFFF"/>
+                    </a:solidFill>
+                  </a:tcPr>
+                </a:tc>
+                <a:tc>
+                  <a:txBody>
+                    <a:bodyPr/>
+                    <a:lstStyle/>
+                    <a:p>
+                      <a:pPr lvl="0" marL="0" indent="0" algn="l">
+                        <a:lnSpc>
+                          <a:spcPct val="118000"/>
+                        </a:lnSpc>
+                        <a:spcBef>
+                          <a:spcPts val="0"/>
+                        </a:spcBef>
+                        <a:buNone/>
+                      </a:pPr>
+                      <a:r>
+                        <a:rPr lang="zh-CN" altLang="en-US" sz="1500" dirty="0">
+                          <a:solidFill>
+                            <a:srgbClr val="333333"/>
+                          </a:solidFill>
+                          <a:latin typeface="Segoe UI"/>
+                          <a:ea typeface="微软雅黑"/>
+                        </a:rPr>
+                        <a:t>待各位给出</a:t>
+                      </a:r>
+                    </a:p>
+                  </a:txBody>
+                  <a:tcPr marL="91440" marR="91440" marT="45720" marB="45720" anchor="ctr">
+                    <a:lnB w="6350">
+                      <a:solidFill>
+                        <a:srgbClr val="E5E7EB"/>
+                      </a:solidFill>
+                    </a:lnB>
+                    <a:solidFill>
+                      <a:srgbClr val="FFFFFF"/>
+                    </a:solidFill>
+                  </a:tcPr>
+                </a:tc>
+              </a:tr>
+            </a:tbl>
+          </a:graphicData>
+        </a:graphic>
+      </p:graphicFrame>
+      <p:sp>
+        <p:nvSpPr>
+          <p:cNvPr id="11" name="body"/>
+          <p:cNvSpPr txBox="1"/>
+          <p:nvPr/>
+        </p:nvSpPr>
+        <p:spPr>
+          <a:xfrm>
+            <a:off x="720000" y="4360000"/>
+            <a:ext cx="10752000" cy="1698000"/>
+          </a:xfrm>
+          <a:prstGeom prst="rect">
+            <a:avLst/>
+          </a:prstGeom>
+          <a:noFill/>
+        </p:spPr>
+        <p:txBody>
+          <a:bodyPr wrap="square" anchor="t">
+            <a:normAutofit/>
+          </a:bodyPr>
+          <a:lstStyle/>
+          <a:p>
+            <a:pPr lvl="0" marL="320000" indent="-320000" algn="l">
+              <a:lnSpc>
+                <a:spcPct val="118000"/>
+              </a:lnSpc>
+              <a:spcBef>
+                <a:spcPts val="340"/>
+              </a:spcBef>
+              <a:buFont typeface="Arial"/>
+              <a:buChar char="▪"/>
+            </a:pPr>
+            <a:r>
+              <a:rPr lang="zh-CN" altLang="en-US" sz="1900" b="1" dirty="0">
+                <a:solidFill>
+                  <a:srgbClr val="1B1F24"/>
+                </a:solidFill>
+                <a:latin typeface="Segoe UI"/>
+                <a:ea typeface="微软雅黑"/>
+              </a:rPr>
+              <a:t>近期</a:t>
+            </a:r>
+            <a:r>
+              <a:rPr lang="zh-CN" altLang="en-US" sz="1900" dirty="0">
+                <a:solidFill>
+                  <a:srgbClr val="1B1F24"/>
+                </a:solidFill>
+                <a:latin typeface="Segoe UI"/>
+                <a:ea typeface="微软雅黑"/>
+              </a:rPr>
+              <a:t>：试点课程知识点细化到 300–500 个；接入第一门课的真实作业数据；首批 2 个项目的任务-知识点映射由导师确认。</a:t>
+            </a:r>
+          </a:p>
+          <a:p>
+            <a:pPr lvl="0" marL="320000" indent="-320000" algn="l">
+              <a:lnSpc>
+                <a:spcPct val="118000"/>
+              </a:lnSpc>
+              <a:spcBef>
+                <a:spcPts val="340"/>
+              </a:spcBef>
+              <a:buFont typeface="Arial"/>
+              <a:buChar char="▪"/>
+            </a:pPr>
+            <a:r>
+              <a:rPr lang="zh-CN" altLang="en-US" sz="1900" b="1" dirty="0">
+                <a:solidFill>
+                  <a:srgbClr val="1B1F24"/>
+                </a:solidFill>
+                <a:latin typeface="Segoe UI"/>
+                <a:ea typeface="微软雅黑"/>
+              </a:rPr>
+              <a:t>战略</a:t>
+            </a:r>
+            <a:r>
+              <a:rPr lang="zh-CN" altLang="en-US" sz="1900" dirty="0">
+                <a:solidFill>
+                  <a:srgbClr val="1B1F24"/>
+                </a:solidFill>
+                <a:latin typeface="Segoe UI"/>
+                <a:ea typeface="微软雅黑"/>
+              </a:rPr>
+              <a:t>：全球仅极少数教学系统有随机对照试验级证据，中文工科场景近乎空白。从现在起按可发表标准采集——实验班 vs 对照组，</a:t>
+            </a:r>
+            <a:r>
+              <a:rPr lang="zh-CN" altLang="en-US" sz="1900" b="1" dirty="0">
+                <a:solidFill>
+                  <a:srgbClr val="1B1F24"/>
+                </a:solidFill>
+                <a:latin typeface="Segoe UI"/>
+                <a:ea typeface="微软雅黑"/>
+              </a:rPr>
+              <a:t>延迟后测</a:t>
+            </a:r>
+            <a:r>
+              <a:rPr lang="zh-CN" altLang="en-US" sz="1900" dirty="0">
+                <a:solidFill>
+                  <a:srgbClr val="1B1F24"/>
+                </a:solidFill>
+                <a:latin typeface="Segoe UI"/>
+                <a:ea typeface="微软雅黑"/>
+              </a:rPr>
+              <a:t>作主指标。</a:t>
+            </a:r>
+          </a:p>
+          <a:p>
+            <a:pPr lvl="1" marL="320000" indent="-320000" algn="l">
+              <a:lnSpc>
+                <a:spcPct val="118000"/>
+              </a:lnSpc>
+              <a:spcBef>
+                <a:spcPts val="340"/>
+              </a:spcBef>
+              <a:buFont typeface="Arial"/>
+              <a:buChar char="–"/>
+            </a:pPr>
+            <a:r>
+              <a:rPr lang="zh-CN" altLang="en-US" sz="1600" dirty="0">
+                <a:solidFill>
+                  <a:srgbClr val="4A5561"/>
+                </a:solidFill>
+                <a:latin typeface="Segoe UI"/>
+                <a:ea typeface="微软雅黑"/>
+              </a:rPr>
+              <a:t>第 2 页右边那个「1–2 σ」，要靠这件事从理论上限变成本班的实测数字。</a:t>
+            </a:r>
+          </a:p>
+        </p:txBody>
+      </p:sp>
+      <p:sp>
+        <p:nvSpPr>
+          <p:cNvPr id="12" name="r12"/>
+          <p:cNvSpPr/>
+          <p:nvPr/>
+        </p:nvSpPr>
+        <p:spPr>
+          <a:xfrm>
+            <a:off x="720000" y="5958000"/>
+            <a:ext cx="10752000" cy="460000"/>
+          </a:xfrm>
+          <a:prstGeom prst="roundRect">
+            <a:avLst>
+              <a:gd name="adj" fmla="val 6000"/>
+            </a:avLst>
+          </a:prstGeom>
+          <a:solidFill>
+            <a:srgbClr val="BF8700">
+              <a:alpha val="10000"/>
+            </a:srgbClr>
+          </a:solidFill>
+          <a:ln>
+            <a:noFill/>
+          </a:ln>
+        </p:spPr>
+        <p:txBody>
+          <a:bodyPr/>
+          <a:lstStyle/>
+          <a:p/>
+        </p:txBody>
+      </p:sp>
+      <p:sp>
+        <p:nvSpPr>
+          <p:cNvPr id="13" name="note"/>
+          <p:cNvSpPr txBox="1"/>
+          <p:nvPr/>
+        </p:nvSpPr>
+        <p:spPr>
+          <a:xfrm>
+            <a:off x="920000" y="5998000"/>
+            <a:ext cx="10352000" cy="400000"/>
+          </a:xfrm>
+          <a:prstGeom prst="rect">
+            <a:avLst/>
+          </a:prstGeom>
+          <a:noFill/>
+        </p:spPr>
+        <p:txBody>
+          <a:bodyPr wrap="square" anchor="t">
+            <a:normAutofit/>
+          </a:bodyPr>
+          <a:lstStyle/>
+          <a:p>
+            <a:pPr lvl="0" marL="0" indent="0" algn="l">
+              <a:lnSpc>
+                <a:spcPct val="118000"/>
+              </a:lnSpc>
+              <a:spcBef>
+                <a:spcPts val="0"/>
+              </a:spcBef>
+              <a:buNone/>
+            </a:pPr>
+            <a:r>
+              <a:rPr lang="zh-CN" altLang="en-US" sz="1400" dirty="0">
+                <a:solidFill>
+                  <a:srgbClr val="8A6400"/>
+                </a:solidFill>
+                <a:latin typeface="Segoe UI"/>
+                <a:ea typeface="微软雅黑"/>
+              </a:rPr>
+              <a:t>评测指标的选择本身就是架构决策：主指标必须是延迟后测与迁移任务，不能是当场正确率——否则会训练出让学生越学越弱的系统。</a:t>
+            </a:r>
+          </a:p>
+        </p:txBody>
+      </p:sp>
+      <p:sp>
+        <p:nvSpPr>
+          <p:cNvPr id="90" name="pg"/>
+          <p:cNvSpPr txBox="1"/>
+          <p:nvPr/>
+        </p:nvSpPr>
+        <p:spPr>
+          <a:xfrm>
+            <a:off x="10572000" y="6378000"/>
+            <a:ext cx="900000" cy="300000"/>
+          </a:xfrm>
+          <a:prstGeom prst="rect">
+            <a:avLst/>
+          </a:prstGeom>
+          <a:noFill/>
+        </p:spPr>
+        <p:txBody>
+          <a:bodyPr wrap="square" anchor="t">
+            <a:normAutofit/>
+          </a:bodyPr>
+          <a:lstStyle/>
+          <a:p>
+            <a:pPr lvl="0" marL="0" indent="0" algn="r">
+              <a:lnSpc>
+                <a:spcPct val="118000"/>
+              </a:lnSpc>
+              <a:spcBef>
+                <a:spcPts val="0"/>
+              </a:spcBef>
+              <a:buNone/>
+            </a:pPr>
+            <a:r>
+              <a:rPr lang="zh-CN" altLang="en-US" sz="1100" dirty="0">
+                <a:solidFill>
+                  <a:srgbClr val="6B7280"/>
+                </a:solidFill>
+                <a:latin typeface="Segoe UI"/>
+                <a:ea typeface="微软雅黑"/>
+              </a:rPr>
+              <a:t>13 / 13</a:t>
             </a:r>
           </a:p>
         </p:txBody>
@@ -3614,7 +4593,7 @@
                 <a:latin typeface="Segoe UI"/>
                 <a:ea typeface="微软雅黑"/>
               </a:rPr>
-              <a:t>2 / 12</a:t>
+              <a:t>2 / 13</a:t>
             </a:r>
           </a:p>
         </p:txBody>
@@ -4438,7 +5417,7 @@
                 <a:latin typeface="Segoe UI"/>
                 <a:ea typeface="微软雅黑"/>
               </a:rPr>
-              <a:t>3 / 12</a:t>
+              <a:t>3 / 13</a:t>
             </a:r>
           </a:p>
         </p:txBody>
@@ -5208,7 +6187,7 @@
                 <a:latin typeface="Segoe UI"/>
                 <a:ea typeface="微软雅黑"/>
               </a:rPr>
-              <a:t>4 / 12</a:t>
+              <a:t>4 / 13</a:t>
             </a:r>
           </a:p>
         </p:txBody>
@@ -6253,7 +7232,7 @@
                 <a:latin typeface="Segoe UI"/>
                 <a:ea typeface="微软雅黑"/>
               </a:rPr>
-              <a:t>5 / 12</a:t>
+              <a:t>5 / 13</a:t>
             </a:r>
           </a:p>
         </p:txBody>
@@ -6894,7 +7873,7 @@
                 <a:latin typeface="Segoe UI"/>
                 <a:ea typeface="微软雅黑"/>
               </a:rPr>
-              <a:t>6 / 12</a:t>
+              <a:t>6 / 13</a:t>
             </a:r>
           </a:p>
         </p:txBody>
@@ -7788,7 +8767,7 @@
                 <a:latin typeface="Segoe UI"/>
                 <a:ea typeface="微软雅黑"/>
               </a:rPr>
-              <a:t>7 / 12</a:t>
+              <a:t>7 / 13</a:t>
             </a:r>
           </a:p>
         </p:txBody>
@@ -8167,7 +9146,7 @@
                 <a:latin typeface="Segoe UI"/>
                 <a:ea typeface="微软雅黑"/>
               </a:rPr>
-              <a:t>8 / 12</a:t>
+              <a:t>8 / 13</a:t>
             </a:r>
           </a:p>
         </p:txBody>
@@ -9002,7 +9981,7 @@
                 <a:latin typeface="Segoe UI"/>
                 <a:ea typeface="微软雅黑"/>
               </a:rPr>
-              <a:t>9 / 12</a:t>
+              <a:t>9 / 13</a:t>
             </a:r>
           </a:p>
         </p:txBody>

--- a/docs/slides/院长实验班AI教学系统_汇报.pptx
+++ b/docs/slides/院长实验班AI教学系统_汇报.pptx
@@ -18,6 +18,8 @@
     <p:sldId id="266" r:id="rId12"/>
     <p:sldId id="267" r:id="rId13"/>
     <p:sldId id="268" r:id="rId14"/>
+    <p:sldId id="269" r:id="rId15"/>
+    <p:sldId id="270" r:id="rId16"/>
   </p:sldIdLst>
   <p:sldSz cx="12192000" cy="6858000"/>
   <p:notesSz cx="6858000" cy="12192000"/>
@@ -994,7 +996,7 @@
                 <a:latin typeface="Segoe UI"/>
                 <a:ea typeface="微软雅黑"/>
               </a:rPr>
-              <a:t>10 / 13</a:t>
+              <a:t>10 / 15</a:t>
             </a:r>
           </a:p>
         </p:txBody>
@@ -1517,7 +1519,7 @@
                           <a:latin typeface="Segoe UI"/>
                           <a:ea typeface="微软雅黑"/>
                         </a:rPr>
-                        <a:t>60 人 / 4874 条</a:t>
+                        <a:t>0 人 / 0 条</a:t>
                       </a:r>
                     </a:p>
                   </a:txBody>
@@ -1640,7 +1642,7 @@
                           <a:latin typeface="Segoe UI"/>
                           <a:ea typeface="微软雅黑"/>
                         </a:rPr>
-                        <a:t>8 / 57</a:t>
+                        <a:t>0 / 0</a:t>
                       </a:r>
                     </a:p>
                   </a:txBody>
@@ -1753,7 +1755,7 @@
                           <a:latin typeface="Segoe UI"/>
                           <a:ea typeface="微软雅黑"/>
                         </a:rPr>
-                        <a:t>1416 条</a:t>
+                        <a:t>0 条</a:t>
                       </a:r>
                     </a:p>
                   </a:txBody>
@@ -2092,7 +2094,7 @@
                 <a:latin typeface="Segoe UI"/>
                 <a:ea typeface="微软雅黑"/>
               </a:rPr>
-              <a:t>11 / 13</a:t>
+              <a:t>11 / 15</a:t>
             </a:r>
           </a:p>
         </p:txBody>
@@ -3070,7 +3072,7 @@
                 <a:latin typeface="Segoe UI"/>
                 <a:ea typeface="微软雅黑"/>
               </a:rPr>
-              <a:t>12 / 13</a:t>
+              <a:t>12 / 15</a:t>
             </a:r>
           </a:p>
         </p:txBody>
@@ -3170,7 +3172,7 @@
                 <a:latin typeface="Segoe UI"/>
                 <a:ea typeface="微软雅黑"/>
               </a:rPr>
-              <a:t>恳请各位拍板，以及下一步</a:t>
+              <a:t>又一个同行印证：Agent 的下一步是「一直在运行、会自己攒经验」</a:t>
             </a:r>
           </a:p>
         </p:txBody>
@@ -3214,7 +3216,7 @@
                 <a:latin typeface="Segoe UI"/>
                 <a:ea typeface="微软雅黑"/>
               </a:rPr>
-              <a:t>参数已全部做成配置，但初值需要教学经验给定</a:t>
+              <a:t>2026 年最受关注的常驻 Agent 产品（如 Hermes）把这条列为核心卖点——不是聊天机器人，是「AI 员工」</a:t>
             </a:r>
           </a:p>
         </p:txBody>
@@ -3227,15 +3229,16 @@
         </p:nvGraphicFramePr>
         <p:xfrm>
           <a:off x="720000" y="1700000"/>
-          <a:ext cx="10752000" cy="2400000"/>
+          <a:ext cx="10752000" cy="1600000"/>
         </p:xfrm>
         <a:graphic>
           <a:graphicData uri="http://schemas.openxmlformats.org/drawingml/2006/table">
             <a:tbl>
               <a:tblPr firstRow="1"/>
               <a:tblGrid>
-                <a:gridCol w="7751441"/>
-                <a:gridCol w="3000558"/>
+                <a:gridCol w="1433600"/>
+                <a:gridCol w="4300800"/>
+                <a:gridCol w="5017600"/>
               </a:tblGrid>
               <a:tr h="400000">
                 <a:tc>
@@ -3260,7 +3263,7 @@
                           <a:latin typeface="Segoe UI"/>
                           <a:ea typeface="微软雅黑"/>
                         </a:rPr>
-                        <a:t>需要各位定的</a:t>
+                        <a:t/>
                       </a:r>
                     </a:p>
                   </a:txBody>
@@ -3297,7 +3300,44 @@
                           <a:latin typeface="Segoe UI"/>
                           <a:ea typeface="微软雅黑"/>
                         </a:rPr>
-                        <a:t>当前初值</a:t>
+                        <a:t>普通 Agent（一次性问答）</a:t>
+                      </a:r>
+                    </a:p>
+                  </a:txBody>
+                  <a:tcPr marL="91440" marR="91440" marT="45720" marB="45720" anchor="ctr">
+                    <a:lnB w="6350">
+                      <a:solidFill>
+                        <a:srgbClr val="E5E7EB"/>
+                      </a:solidFill>
+                    </a:lnB>
+                    <a:solidFill>
+                      <a:srgbClr val="F2F5F9"/>
+                    </a:solidFill>
+                  </a:tcPr>
+                </a:tc>
+                <a:tc>
+                  <a:txBody>
+                    <a:bodyPr/>
+                    <a:lstStyle/>
+                    <a:p>
+                      <a:pPr lvl="0" marL="0" indent="0" algn="l">
+                        <a:lnSpc>
+                          <a:spcPct val="118000"/>
+                        </a:lnSpc>
+                        <a:spcBef>
+                          <a:spcPts val="0"/>
+                        </a:spcBef>
+                        <a:buNone/>
+                      </a:pPr>
+                      <a:r>
+                        <a:rPr lang="zh-CN" altLang="en-US" sz="1500" b="1" dirty="0">
+                          <a:solidFill>
+                            <a:srgbClr val="1B1F24"/>
+                          </a:solidFill>
+                          <a:latin typeface="Segoe UI"/>
+                          <a:ea typeface="微软雅黑"/>
+                        </a:rPr>
+                        <a:t>常驻学习型 Agent</a:t>
                       </a:r>
                     </a:p>
                   </a:txBody>
@@ -3336,7 +3376,7 @@
                           <a:latin typeface="Segoe UI"/>
                           <a:ea typeface="微软雅黑"/>
                         </a:rPr>
-                        <a:t>知识点拆到多细？一门课 300 还是 500 个？</a:t>
+                        <a:t>流程</a:t>
                       </a:r>
                     </a:p>
                   </a:txBody>
@@ -3373,7 +3413,44 @@
                           <a:latin typeface="Segoe UI"/>
                           <a:ea typeface="微软雅黑"/>
                         </a:rPr>
-                        <a:t>183（偏粗）</a:t>
+                        <a:t>用户提问 → 回答 → 结束</a:t>
+                      </a:r>
+                    </a:p>
+                  </a:txBody>
+                  <a:tcPr marL="91440" marR="91440" marT="45720" marB="45720" anchor="ctr">
+                    <a:lnB w="6350">
+                      <a:solidFill>
+                        <a:srgbClr val="E5E7EB"/>
+                      </a:solidFill>
+                    </a:lnB>
+                    <a:solidFill>
+                      <a:srgbClr val="FFFFFF"/>
+                    </a:solidFill>
+                  </a:tcPr>
+                </a:tc>
+                <a:tc>
+                  <a:txBody>
+                    <a:bodyPr/>
+                    <a:lstStyle/>
+                    <a:p>
+                      <a:pPr lvl="0" marL="0" indent="0" algn="l">
+                        <a:lnSpc>
+                          <a:spcPct val="118000"/>
+                        </a:lnSpc>
+                        <a:spcBef>
+                          <a:spcPts val="0"/>
+                        </a:spcBef>
+                        <a:buNone/>
+                      </a:pPr>
+                      <a:r>
+                        <a:rPr lang="zh-CN" altLang="en-US" sz="1500" dirty="0">
+                          <a:solidFill>
+                            <a:srgbClr val="333333"/>
+                          </a:solidFill>
+                          <a:latin typeface="Segoe UI"/>
+                          <a:ea typeface="微软雅黑"/>
+                        </a:rPr>
+                        <a:t>完成任务 → 总结经验 → 生成技能 →存入记忆 → 下次直接复用</a:t>
                       </a:r>
                     </a:p>
                   </a:txBody>
@@ -3405,14 +3482,14 @@
                         <a:buNone/>
                       </a:pPr>
                       <a:r>
-                        <a:rPr lang="zh-CN" altLang="en-US" sz="1500" b="1" dirty="0">
+                        <a:rPr lang="zh-CN" altLang="en-US" sz="1500" dirty="0">
                           <a:solidFill>
                             <a:srgbClr val="333333"/>
                           </a:solidFill>
                           <a:latin typeface="Segoe UI"/>
                           <a:ea typeface="微软雅黑"/>
                         </a:rPr>
-                        <a:t>诊断报告里最想第一时间看到哪几件事？</a:t>
+                        <a:t>第 1 次写一份报告</a:t>
                       </a:r>
                     </a:p>
                   </a:txBody>
@@ -3449,7 +3526,44 @@
                           <a:latin typeface="Segoe UI"/>
                           <a:ea typeface="微软雅黑"/>
                         </a:rPr>
-                        <a:t>六项，可增删</a:t>
+                        <a:t>认真推理一遍</a:t>
+                      </a:r>
+                    </a:p>
+                  </a:txBody>
+                  <a:tcPr marL="91440" marR="91440" marT="45720" marB="45720" anchor="ctr">
+                    <a:lnB w="6350">
+                      <a:solidFill>
+                        <a:srgbClr val="E5E7EB"/>
+                      </a:solidFill>
+                    </a:lnB>
+                    <a:solidFill>
+                      <a:srgbClr val="FFFFFF"/>
+                    </a:solidFill>
+                  </a:tcPr>
+                </a:tc>
+                <a:tc>
+                  <a:txBody>
+                    <a:bodyPr/>
+                    <a:lstStyle/>
+                    <a:p>
+                      <a:pPr lvl="0" marL="0" indent="0" algn="l">
+                        <a:lnSpc>
+                          <a:spcPct val="118000"/>
+                        </a:lnSpc>
+                        <a:spcBef>
+                          <a:spcPts val="0"/>
+                        </a:spcBef>
+                        <a:buNone/>
+                      </a:pPr>
+                      <a:r>
+                        <a:rPr lang="zh-CN" altLang="en-US" sz="1500" dirty="0">
+                          <a:solidFill>
+                            <a:srgbClr val="333333"/>
+                          </a:solidFill>
+                          <a:latin typeface="Segoe UI"/>
+                          <a:ea typeface="微软雅黑"/>
+                        </a:rPr>
+                        <a:t>同样认真推理一遍</a:t>
                       </a:r>
                     </a:p>
                   </a:txBody>
@@ -3488,7 +3602,7 @@
                           <a:latin typeface="Segoe UI"/>
                           <a:ea typeface="微软雅黑"/>
                         </a:rPr>
-                        <a:t>掌握度低于多少判定「未掌握」；追问几次后降级</a:t>
+                        <a:t>第 10 次写同一类报告</a:t>
                       </a:r>
                     </a:p>
                   </a:txBody>
@@ -3518,14 +3632,14 @@
                         <a:buNone/>
                       </a:pPr>
                       <a:r>
-                        <a:rPr lang="zh-CN" altLang="en-US" sz="1500" dirty="0">
+                        <a:rPr lang="zh-CN" altLang="en-US" sz="1500" b="1" dirty="0">
                           <a:solidFill>
                             <a:srgbClr val="333333"/>
                           </a:solidFill>
                           <a:latin typeface="Segoe UI"/>
                           <a:ea typeface="微软雅黑"/>
                         </a:rPr>
-                        <a:t>0.75；3 次</a:t>
+                        <a:t>还是从头推理一遍</a:t>
                       </a:r>
                     </a:p>
                   </a:txBody>
@@ -3540,8 +3654,6 @@
                     </a:solidFill>
                   </a:tcPr>
                 </a:tc>
-              </a:tr>
-              <a:tr h="400000">
                 <a:tc>
                   <a:txBody>
                     <a:bodyPr/>
@@ -3564,120 +3676,7 @@
                           <a:latin typeface="Segoe UI"/>
                           <a:ea typeface="微软雅黑"/>
                         </a:rPr>
-                        <a:t>两次做对相隔多少天才算「已验证掌握」</a:t>
-                      </a:r>
-                    </a:p>
-                  </a:txBody>
-                  <a:tcPr marL="91440" marR="91440" marT="45720" marB="45720" anchor="ctr">
-                    <a:lnB w="6350">
-                      <a:solidFill>
-                        <a:srgbClr val="E5E7EB"/>
-                      </a:solidFill>
-                    </a:lnB>
-                    <a:solidFill>
-                      <a:srgbClr val="FFFFFF"/>
-                    </a:solidFill>
-                  </a:tcPr>
-                </a:tc>
-                <a:tc>
-                  <a:txBody>
-                    <a:bodyPr/>
-                    <a:lstStyle/>
-                    <a:p>
-                      <a:pPr lvl="0" marL="0" indent="0" algn="l">
-                        <a:lnSpc>
-                          <a:spcPct val="118000"/>
-                        </a:lnSpc>
-                        <a:spcBef>
-                          <a:spcPts val="0"/>
-                        </a:spcBef>
-                        <a:buNone/>
-                      </a:pPr>
-                      <a:r>
-                        <a:rPr lang="zh-CN" altLang="en-US" sz="1500" dirty="0">
-                          <a:solidFill>
-                            <a:srgbClr val="333333"/>
-                          </a:solidFill>
-                          <a:latin typeface="Segoe UI"/>
-                          <a:ea typeface="微软雅黑"/>
-                        </a:rPr>
-                        <a:t>7 天</a:t>
-                      </a:r>
-                    </a:p>
-                  </a:txBody>
-                  <a:tcPr marL="91440" marR="91440" marT="45720" marB="45720" anchor="ctr">
-                    <a:lnB w="6350">
-                      <a:solidFill>
-                        <a:srgbClr val="E5E7EB"/>
-                      </a:solidFill>
-                    </a:lnB>
-                    <a:solidFill>
-                      <a:srgbClr val="FFFFFF"/>
-                    </a:solidFill>
-                  </a:tcPr>
-                </a:tc>
-              </a:tr>
-              <a:tr h="400000">
-                <a:tc>
-                  <a:txBody>
-                    <a:bodyPr/>
-                    <a:lstStyle/>
-                    <a:p>
-                      <a:pPr lvl="0" marL="0" indent="0" algn="l">
-                        <a:lnSpc>
-                          <a:spcPct val="118000"/>
-                        </a:lnSpc>
-                        <a:spcBef>
-                          <a:spcPts val="0"/>
-                        </a:spcBef>
-                        <a:buNone/>
-                      </a:pPr>
-                      <a:r>
-                        <a:rPr lang="zh-CN" altLang="en-US" sz="1500" dirty="0">
-                          <a:solidFill>
-                            <a:srgbClr val="333333"/>
-                          </a:solidFill>
-                          <a:latin typeface="Segoe UI"/>
-                          <a:ea typeface="微软雅黑"/>
-                        </a:rPr>
-                        <a:t>指导项目时，你凭哪些迹象判断一个学生真的懂了？</a:t>
-                      </a:r>
-                    </a:p>
-                  </a:txBody>
-                  <a:tcPr marL="91440" marR="91440" marT="45720" marB="45720" anchor="ctr">
-                    <a:lnB w="6350">
-                      <a:solidFill>
-                        <a:srgbClr val="E5E7EB"/>
-                      </a:solidFill>
-                    </a:lnB>
-                    <a:solidFill>
-                      <a:srgbClr val="FFFFFF"/>
-                    </a:solidFill>
-                  </a:tcPr>
-                </a:tc>
-                <a:tc>
-                  <a:txBody>
-                    <a:bodyPr/>
-                    <a:lstStyle/>
-                    <a:p>
-                      <a:pPr lvl="0" marL="0" indent="0" algn="l">
-                        <a:lnSpc>
-                          <a:spcPct val="118000"/>
-                        </a:lnSpc>
-                        <a:spcBef>
-                          <a:spcPts val="0"/>
-                        </a:spcBef>
-                        <a:buNone/>
-                      </a:pPr>
-                      <a:r>
-                        <a:rPr lang="zh-CN" altLang="en-US" sz="1500" dirty="0">
-                          <a:solidFill>
-                            <a:srgbClr val="333333"/>
-                          </a:solidFill>
-                          <a:latin typeface="Segoe UI"/>
-                          <a:ea typeface="微软雅黑"/>
-                        </a:rPr>
-                        <a:t>待各位给出</a:t>
+                        <a:t>直接调用沉淀出的技能，越用越快</a:t>
                       </a:r>
                     </a:p>
                   </a:txBody>
@@ -3705,8 +3704,8 @@
         </p:nvSpPr>
         <p:spPr>
           <a:xfrm>
-            <a:off x="720000" y="4360000"/>
-            <a:ext cx="10752000" cy="1698000"/>
+            <a:off x="720000" y="3560000"/>
+            <a:ext cx="10752000" cy="2498000"/>
           </a:xfrm>
           <a:prstGeom prst="rect">
             <a:avLst/>
@@ -3730,24 +3729,14 @@
               <a:buChar char="▪"/>
             </a:pPr>
             <a:r>
-              <a:rPr lang="zh-CN" altLang="en-US" sz="1900" b="1" dirty="0">
+              <a:rPr lang="zh-CN" altLang="en-US" sz="1900" dirty="0">
                 <a:solidFill>
                   <a:srgbClr val="1B1F24"/>
                 </a:solidFill>
                 <a:latin typeface="Segoe UI"/>
                 <a:ea typeface="微软雅黑"/>
               </a:rPr>
-              <a:t>近期</a:t>
-            </a:r>
-            <a:r>
-              <a:rPr lang="zh-CN" altLang="en-US" sz="1900" dirty="0">
-                <a:solidFill>
-                  <a:srgbClr val="1B1F24"/>
-                </a:solidFill>
-                <a:latin typeface="Segoe UI"/>
-                <a:ea typeface="微软雅黑"/>
-              </a:rPr>
-              <a:t>：试点课程知识点细化到 300–500 个；接入第一门课的真实作业数据；首批 2 个项目的任务-知识点映射由导师确认。</a:t>
+              <a:t>支撑这条主张的五个模块——持久记忆、技能沉淀、子智能体协作、定时任务、工具调用——撑起的是「AI 员工」而不是「聊天机器人」这条定位。</a:t>
             </a:r>
           </a:p>
           <a:p>
@@ -3769,7 +3758,7 @@
                 <a:latin typeface="Segoe UI"/>
                 <a:ea typeface="微软雅黑"/>
               </a:rPr>
-              <a:t>战略</a:t>
+              <a:t>这和我们已经在做的事情，本质是同一件事</a:t>
             </a:r>
             <a:r>
               <a:rPr lang="zh-CN" altLang="en-US" sz="1900" dirty="0">
@@ -3779,49 +3768,7 @@
                 <a:latin typeface="Segoe UI"/>
                 <a:ea typeface="微软雅黑"/>
               </a:rPr>
-              <a:t>：全球仅极少数教学系统有随机对照试验级证据，中文工科场景近乎空白。从现在起按可发表标准采集——实验班 vs 对照组，</a:t>
-            </a:r>
-            <a:r>
-              <a:rPr lang="zh-CN" altLang="en-US" sz="1900" b="1" dirty="0">
-                <a:solidFill>
-                  <a:srgbClr val="1B1F24"/>
-                </a:solidFill>
-                <a:latin typeface="Segoe UI"/>
-                <a:ea typeface="微软雅黑"/>
-              </a:rPr>
-              <a:t>延迟后测</a:t>
-            </a:r>
-            <a:r>
-              <a:rPr lang="zh-CN" altLang="en-US" sz="1900" dirty="0">
-                <a:solidFill>
-                  <a:srgbClr val="1B1F24"/>
-                </a:solidFill>
-                <a:latin typeface="Segoe UI"/>
-                <a:ea typeface="微软雅黑"/>
-              </a:rPr>
-              <a:t>作主指标。</a:t>
-            </a:r>
-          </a:p>
-          <a:p>
-            <a:pPr lvl="1" marL="320000" indent="-320000" algn="l">
-              <a:lnSpc>
-                <a:spcPct val="118000"/>
-              </a:lnSpc>
-              <a:spcBef>
-                <a:spcPts val="340"/>
-              </a:spcBef>
-              <a:buFont typeface="Arial"/>
-              <a:buChar char="–"/>
-            </a:pPr>
-            <a:r>
-              <a:rPr lang="zh-CN" altLang="en-US" sz="1600" dirty="0">
-                <a:solidFill>
-                  <a:srgbClr val="4A5561"/>
-                </a:solidFill>
-                <a:latin typeface="Segoe UI"/>
-                <a:ea typeface="微软雅黑"/>
-              </a:rPr>
-              <a:t>第 2 页右边那个「1–2 σ」，要靠这件事从理论上限变成本班的实测数字。</a:t>
+              <a:t>：错误模式库、审查规则映射、教师简报，都是把「做过一次的判断」沉淀成「下次直接复用的资产」——只是我们的场景是教学，不是通用办公。</a:t>
             </a:r>
           </a:p>
         </p:txBody>
@@ -3896,7 +3843,7 @@
                 <a:latin typeface="Segoe UI"/>
                 <a:ea typeface="微软雅黑"/>
               </a:rPr>
-              <a:t>评测指标的选择本身就是架构决策：主指标必须是延迟后测与迁移任务，不能是当场正确率——否则会训练出让学生越学越弱的系统。</a:t>
+              <a:t>下一页说清楚：这五个模块，哪些我们直接吸收、哪些我们刻意不跟。</a:t>
             </a:r>
           </a:p>
         </p:txBody>
@@ -3940,7 +3887,1605 @@
                 <a:latin typeface="Segoe UI"/>
                 <a:ea typeface="微软雅黑"/>
               </a:rPr>
-              <a:t>13 / 13</a:t>
+              <a:t>13 / 15</a:t>
+            </a:r>
+          </a:p>
+        </p:txBody>
+      </p:sp>
+    </p:spTree>
+  </p:cSld>
+  <p:clrMapOvr>
+    <a:overrideClrMapping bg1="lt1" tx1="dk1" bg2="lt2" tx2="dk2" accent1="accent1" accent2="accent2" accent3="accent3" accent4="accent4" accent5="accent5" accent6="accent6" hlink="hlink" folHlink="folHlink"/>
+  </p:clrMapOvr>
+</p:sld>
+</file>
+
+<file path=ppt/slides/slide14.xml><?xml version="1.0" encoding="utf-8"?>
+<p:sld xmlns:a="http://schemas.openxmlformats.org/drawingml/2006/main" xmlns:r="http://schemas.openxmlformats.org/officeDocument/2006/relationships" xmlns:p="http://schemas.openxmlformats.org/presentationml/2006/main">
+  <p:cSld>
+    <p:spTree>
+      <p:nvGrpSpPr>
+        <p:cNvPr id="1" name=""/>
+        <p:cNvGrpSpPr/>
+        <p:nvPr/>
+      </p:nvGrpSpPr>
+      <p:grpSpPr>
+        <a:xfrm>
+          <a:off x="0" y="0"/>
+          <a:ext cx="0" cy="0"/>
+          <a:chOff x="0" y="0"/>
+          <a:chExt cx="0" cy="0"/>
+        </a:xfrm>
+      </p:grpSpPr>
+      <p:sp>
+        <p:nvSpPr>
+          <p:cNvPr id="2" name="r2"/>
+          <p:cNvSpPr/>
+          <p:nvPr/>
+        </p:nvSpPr>
+        <p:spPr>
+          <a:xfrm>
+            <a:off x="720000" y="660000"/>
+            <a:ext cx="90000" cy="420000"/>
+          </a:xfrm>
+          <a:prstGeom prst="roundRect">
+            <a:avLst>
+              <a:gd name="adj" fmla="val 6000"/>
+            </a:avLst>
+          </a:prstGeom>
+          <a:solidFill>
+            <a:srgbClr val="1F6FEB">
+              <a:alpha val="100000"/>
+            </a:srgbClr>
+          </a:solidFill>
+          <a:ln>
+            <a:noFill/>
+          </a:ln>
+        </p:spPr>
+        <p:txBody>
+          <a:bodyPr/>
+          <a:lstStyle/>
+          <a:p/>
+        </p:txBody>
+      </p:sp>
+      <p:sp>
+        <p:nvSpPr>
+          <p:cNvPr id="3" name="title"/>
+          <p:cNvSpPr txBox="1"/>
+          <p:nvPr/>
+        </p:nvSpPr>
+        <p:spPr>
+          <a:xfrm>
+            <a:off x="940000" y="620000"/>
+            <a:ext cx="10752000" cy="620000"/>
+          </a:xfrm>
+          <a:prstGeom prst="rect">
+            <a:avLst/>
+          </a:prstGeom>
+          <a:noFill/>
+        </p:spPr>
+        <p:txBody>
+          <a:bodyPr wrap="square" anchor="t">
+            <a:normAutofit/>
+          </a:bodyPr>
+          <a:lstStyle/>
+          <a:p>
+            <a:pPr lvl="0" marL="0" indent="0" algn="l">
+              <a:lnSpc>
+                <a:spcPct val="118000"/>
+              </a:lnSpc>
+              <a:spcBef>
+                <a:spcPts val="0"/>
+              </a:spcBef>
+              <a:buNone/>
+            </a:pPr>
+            <a:r>
+              <a:rPr lang="zh-CN" altLang="en-US" sz="2700" b="1" dirty="0">
+                <a:solidFill>
+                  <a:srgbClr val="1B1F24"/>
+                </a:solidFill>
+                <a:latin typeface="Segoe UI"/>
+                <a:ea typeface="微软雅黑"/>
+              </a:rPr>
+              <a:t>把「会成长」翻译成教学场景：吸收四点，明确不做两件事</a:t>
+            </a:r>
+          </a:p>
+        </p:txBody>
+      </p:sp>
+      <p:graphicFrame>
+        <p:nvGraphicFramePr>
+          <p:cNvPr id="10" name="t10"/>
+          <p:cNvGraphicFramePr/>
+          <p:nvPr/>
+        </p:nvGraphicFramePr>
+        <p:xfrm>
+          <a:off x="720000" y="1400000"/>
+          <a:ext cx="10752000" cy="2000000"/>
+        </p:xfrm>
+        <a:graphic>
+          <a:graphicData uri="http://schemas.openxmlformats.org/drawingml/2006/table">
+            <a:tbl>
+              <a:tblPr firstRow="1"/>
+              <a:tblGrid>
+                <a:gridCol w="1954909"/>
+                <a:gridCol w="8797090"/>
+              </a:tblGrid>
+              <a:tr h="400000">
+                <a:tc>
+                  <a:txBody>
+                    <a:bodyPr/>
+                    <a:lstStyle/>
+                    <a:p>
+                      <a:pPr lvl="0" marL="0" indent="0" algn="l">
+                        <a:lnSpc>
+                          <a:spcPct val="118000"/>
+                        </a:lnSpc>
+                        <a:spcBef>
+                          <a:spcPts val="0"/>
+                        </a:spcBef>
+                        <a:buNone/>
+                      </a:pPr>
+                      <a:r>
+                        <a:rPr lang="zh-CN" altLang="en-US" sz="1500" b="1" dirty="0">
+                          <a:solidFill>
+                            <a:srgbClr val="1B1F24"/>
+                          </a:solidFill>
+                          <a:latin typeface="Segoe UI"/>
+                          <a:ea typeface="微软雅黑"/>
+                        </a:rPr>
+                        <a:t>模块</a:t>
+                      </a:r>
+                    </a:p>
+                  </a:txBody>
+                  <a:tcPr marL="91440" marR="91440" marT="45720" marB="45720" anchor="ctr">
+                    <a:lnB w="6350">
+                      <a:solidFill>
+                        <a:srgbClr val="E5E7EB"/>
+                      </a:solidFill>
+                    </a:lnB>
+                    <a:solidFill>
+                      <a:srgbClr val="F2F5F9"/>
+                    </a:solidFill>
+                  </a:tcPr>
+                </a:tc>
+                <a:tc>
+                  <a:txBody>
+                    <a:bodyPr/>
+                    <a:lstStyle/>
+                    <a:p>
+                      <a:pPr lvl="0" marL="0" indent="0" algn="l">
+                        <a:lnSpc>
+                          <a:spcPct val="118000"/>
+                        </a:lnSpc>
+                        <a:spcBef>
+                          <a:spcPts val="0"/>
+                        </a:spcBef>
+                        <a:buNone/>
+                      </a:pPr>
+                      <a:r>
+                        <a:rPr lang="zh-CN" altLang="en-US" sz="1500" b="1" dirty="0">
+                          <a:solidFill>
+                            <a:srgbClr val="1B1F24"/>
+                          </a:solidFill>
+                          <a:latin typeface="Segoe UI"/>
+                          <a:ea typeface="微软雅黑"/>
+                        </a:rPr>
+                        <a:t>落到我们系统里，是下一步要做的事</a:t>
+                      </a:r>
+                    </a:p>
+                  </a:txBody>
+                  <a:tcPr marL="91440" marR="91440" marT="45720" marB="45720" anchor="ctr">
+                    <a:lnB w="6350">
+                      <a:solidFill>
+                        <a:srgbClr val="E5E7EB"/>
+                      </a:solidFill>
+                    </a:lnB>
+                    <a:solidFill>
+                      <a:srgbClr val="F2F5F9"/>
+                    </a:solidFill>
+                  </a:tcPr>
+                </a:tc>
+              </a:tr>
+              <a:tr h="400000">
+                <a:tc>
+                  <a:txBody>
+                    <a:bodyPr/>
+                    <a:lstStyle/>
+                    <a:p>
+                      <a:pPr lvl="0" marL="0" indent="0" algn="l">
+                        <a:lnSpc>
+                          <a:spcPct val="118000"/>
+                        </a:lnSpc>
+                        <a:spcBef>
+                          <a:spcPts val="0"/>
+                        </a:spcBef>
+                        <a:buNone/>
+                      </a:pPr>
+                      <a:r>
+                        <a:rPr lang="zh-CN" altLang="en-US" sz="1500" dirty="0">
+                          <a:solidFill>
+                            <a:srgbClr val="333333"/>
+                          </a:solidFill>
+                          <a:latin typeface="Segoe UI"/>
+                          <a:ea typeface="微软雅黑"/>
+                        </a:rPr>
+                        <a:t>持久记忆</a:t>
+                      </a:r>
+                    </a:p>
+                  </a:txBody>
+                  <a:tcPr marL="91440" marR="91440" marT="45720" marB="45720" anchor="ctr">
+                    <a:lnB w="6350">
+                      <a:solidFill>
+                        <a:srgbClr val="E5E7EB"/>
+                      </a:solidFill>
+                    </a:lnB>
+                    <a:solidFill>
+                      <a:srgbClr val="FFFFFF"/>
+                    </a:solidFill>
+                  </a:tcPr>
+                </a:tc>
+                <a:tc>
+                  <a:txBody>
+                    <a:bodyPr/>
+                    <a:lstStyle/>
+                    <a:p>
+                      <a:pPr lvl="0" marL="0" indent="0" algn="l">
+                        <a:lnSpc>
+                          <a:spcPct val="118000"/>
+                        </a:lnSpc>
+                        <a:spcBef>
+                          <a:spcPts val="0"/>
+                        </a:spcBef>
+                        <a:buNone/>
+                      </a:pPr>
+                      <a:r>
+                        <a:rPr lang="zh-CN" altLang="en-US" sz="1500" dirty="0">
+                          <a:solidFill>
+                            <a:srgbClr val="333333"/>
+                          </a:solidFill>
+                          <a:latin typeface="Segoe UI"/>
+                          <a:ea typeface="微软雅黑"/>
+                        </a:rPr>
+                        <a:t>教师画像常态化：偏好的表达风格、常用案例跨会话记住，结构化入库，不是让模型自己记</a:t>
+                      </a:r>
+                    </a:p>
+                  </a:txBody>
+                  <a:tcPr marL="91440" marR="91440" marT="45720" marB="45720" anchor="ctr">
+                    <a:lnB w="6350">
+                      <a:solidFill>
+                        <a:srgbClr val="E5E7EB"/>
+                      </a:solidFill>
+                    </a:lnB>
+                    <a:solidFill>
+                      <a:srgbClr val="FFFFFF"/>
+                    </a:solidFill>
+                  </a:tcPr>
+                </a:tc>
+              </a:tr>
+              <a:tr h="400000">
+                <a:tc>
+                  <a:txBody>
+                    <a:bodyPr/>
+                    <a:lstStyle/>
+                    <a:p>
+                      <a:pPr lvl="0" marL="0" indent="0" algn="l">
+                        <a:lnSpc>
+                          <a:spcPct val="118000"/>
+                        </a:lnSpc>
+                        <a:spcBef>
+                          <a:spcPts val="0"/>
+                        </a:spcBef>
+                        <a:buNone/>
+                      </a:pPr>
+                      <a:r>
+                        <a:rPr lang="zh-CN" altLang="en-US" sz="1500" dirty="0">
+                          <a:solidFill>
+                            <a:srgbClr val="333333"/>
+                          </a:solidFill>
+                          <a:latin typeface="Segoe UI"/>
+                          <a:ea typeface="微软雅黑"/>
+                        </a:rPr>
+                        <a:t>技能沉淀</a:t>
+                      </a:r>
+                    </a:p>
+                  </a:txBody>
+                  <a:tcPr marL="91440" marR="91440" marT="45720" marB="45720" anchor="ctr">
+                    <a:lnB w="6350">
+                      <a:solidFill>
+                        <a:srgbClr val="E5E7EB"/>
+                      </a:solidFill>
+                    </a:lnB>
+                    <a:solidFill>
+                      <a:srgbClr val="FFFFFF"/>
+                    </a:solidFill>
+                  </a:tcPr>
+                </a:tc>
+                <a:tc>
+                  <a:txBody>
+                    <a:bodyPr/>
+                    <a:lstStyle/>
+                    <a:p>
+                      <a:pPr lvl="0" marL="0" indent="0" algn="l">
+                        <a:lnSpc>
+                          <a:spcPct val="118000"/>
+                        </a:lnSpc>
+                        <a:spcBef>
+                          <a:spcPts val="0"/>
+                        </a:spcBef>
+                        <a:buNone/>
+                      </a:pPr>
+                      <a:r>
+                        <a:rPr lang="zh-CN" altLang="en-US" sz="1500" dirty="0">
+                          <a:solidFill>
+                            <a:srgbClr val="333333"/>
+                          </a:solidFill>
+                          <a:latin typeface="Segoe UI"/>
+                          <a:ea typeface="微软雅黑"/>
+                        </a:rPr>
+                        <a:t>错误模式库、审查规则已是雏形；下一步把「教师确认过的追问话术/命题模板」也做成同样版本化、可审计的规则资产</a:t>
+                      </a:r>
+                    </a:p>
+                  </a:txBody>
+                  <a:tcPr marL="91440" marR="91440" marT="45720" marB="45720" anchor="ctr">
+                    <a:lnB w="6350">
+                      <a:solidFill>
+                        <a:srgbClr val="E5E7EB"/>
+                      </a:solidFill>
+                    </a:lnB>
+                    <a:solidFill>
+                      <a:srgbClr val="FFFFFF"/>
+                    </a:solidFill>
+                  </a:tcPr>
+                </a:tc>
+              </a:tr>
+              <a:tr h="400000">
+                <a:tc>
+                  <a:txBody>
+                    <a:bodyPr/>
+                    <a:lstStyle/>
+                    <a:p>
+                      <a:pPr lvl="0" marL="0" indent="0" algn="l">
+                        <a:lnSpc>
+                          <a:spcPct val="118000"/>
+                        </a:lnSpc>
+                        <a:spcBef>
+                          <a:spcPts val="0"/>
+                        </a:spcBef>
+                        <a:buNone/>
+                      </a:pPr>
+                      <a:r>
+                        <a:rPr lang="zh-CN" altLang="en-US" sz="1500" dirty="0">
+                          <a:solidFill>
+                            <a:srgbClr val="333333"/>
+                          </a:solidFill>
+                          <a:latin typeface="Segoe UI"/>
+                          <a:ea typeface="微软雅黑"/>
+                        </a:rPr>
+                        <a:t>定时任务</a:t>
+                      </a:r>
+                    </a:p>
+                  </a:txBody>
+                  <a:tcPr marL="91440" marR="91440" marT="45720" marB="45720" anchor="ctr">
+                    <a:lnB w="6350">
+                      <a:solidFill>
+                        <a:srgbClr val="E5E7EB"/>
+                      </a:solidFill>
+                    </a:lnB>
+                    <a:solidFill>
+                      <a:srgbClr val="FFFFFF"/>
+                    </a:solidFill>
+                  </a:tcPr>
+                </a:tc>
+                <a:tc>
+                  <a:txBody>
+                    <a:bodyPr/>
+                    <a:lstStyle/>
+                    <a:p>
+                      <a:pPr lvl="0" marL="0" indent="0" algn="l">
+                        <a:lnSpc>
+                          <a:spcPct val="118000"/>
+                        </a:lnSpc>
+                        <a:spcBef>
+                          <a:spcPts val="0"/>
+                        </a:spcBef>
+                        <a:buNone/>
+                      </a:pPr>
+                      <a:r>
+                        <a:rPr lang="zh-CN" altLang="en-US" sz="1500" dirty="0">
+                          <a:solidFill>
+                            <a:srgbClr val="333333"/>
+                          </a:solidFill>
+                          <a:latin typeface="Segoe UI"/>
+                          <a:ea typeface="微软雅黑"/>
+                        </a:rPr>
+                        <a:t>复检提醒、教师周简报接入定时器，到点自动生成，教师审阅而非等着主动点开</a:t>
+                      </a:r>
+                    </a:p>
+                  </a:txBody>
+                  <a:tcPr marL="91440" marR="91440" marT="45720" marB="45720" anchor="ctr">
+                    <a:lnB w="6350">
+                      <a:solidFill>
+                        <a:srgbClr val="E5E7EB"/>
+                      </a:solidFill>
+                    </a:lnB>
+                    <a:solidFill>
+                      <a:srgbClr val="FFFFFF"/>
+                    </a:solidFill>
+                  </a:tcPr>
+                </a:tc>
+              </a:tr>
+              <a:tr h="400000">
+                <a:tc>
+                  <a:txBody>
+                    <a:bodyPr/>
+                    <a:lstStyle/>
+                    <a:p>
+                      <a:pPr lvl="0" marL="0" indent="0" algn="l">
+                        <a:lnSpc>
+                          <a:spcPct val="118000"/>
+                        </a:lnSpc>
+                        <a:spcBef>
+                          <a:spcPts val="0"/>
+                        </a:spcBef>
+                        <a:buNone/>
+                      </a:pPr>
+                      <a:r>
+                        <a:rPr lang="zh-CN" altLang="en-US" sz="1500" dirty="0">
+                          <a:solidFill>
+                            <a:srgbClr val="333333"/>
+                          </a:solidFill>
+                          <a:latin typeface="Segoe UI"/>
+                          <a:ea typeface="微软雅黑"/>
+                        </a:rPr>
+                        <a:t>多智能体协作</a:t>
+                      </a:r>
+                    </a:p>
+                  </a:txBody>
+                  <a:tcPr marL="91440" marR="91440" marT="45720" marB="45720" anchor="ctr">
+                    <a:lnB w="6350">
+                      <a:solidFill>
+                        <a:srgbClr val="E5E7EB"/>
+                      </a:solidFill>
+                    </a:lnB>
+                    <a:solidFill>
+                      <a:srgbClr val="FFFFFF"/>
+                    </a:solidFill>
+                  </a:tcPr>
+                </a:tc>
+                <a:tc>
+                  <a:txBody>
+                    <a:bodyPr/>
+                    <a:lstStyle/>
+                    <a:p>
+                      <a:pPr lvl="0" marL="0" indent="0" algn="l">
+                        <a:lnSpc>
+                          <a:spcPct val="118000"/>
+                        </a:lnSpc>
+                        <a:spcBef>
+                          <a:spcPts val="0"/>
+                        </a:spcBef>
+                        <a:buNone/>
+                      </a:pPr>
+                      <a:r>
+                        <a:rPr lang="zh-CN" altLang="en-US" sz="1500" dirty="0">
+                          <a:solidFill>
+                            <a:srgbClr val="333333"/>
+                          </a:solidFill>
+                          <a:latin typeface="Segoe UI"/>
+                          <a:ea typeface="微软雅黑"/>
+                        </a:rPr>
+                        <a:t>「缺口分析 → 追问 → 课件生成」串成一条教师按一次按钮就能走完的流水线</a:t>
+                      </a:r>
+                    </a:p>
+                  </a:txBody>
+                  <a:tcPr marL="91440" marR="91440" marT="45720" marB="45720" anchor="ctr">
+                    <a:lnB w="6350">
+                      <a:solidFill>
+                        <a:srgbClr val="E5E7EB"/>
+                      </a:solidFill>
+                    </a:lnB>
+                    <a:solidFill>
+                      <a:srgbClr val="FFFFFF"/>
+                    </a:solidFill>
+                  </a:tcPr>
+                </a:tc>
+              </a:tr>
+            </a:tbl>
+          </a:graphicData>
+        </a:graphic>
+      </p:graphicFrame>
+      <p:sp>
+        <p:nvSpPr>
+          <p:cNvPr id="11" name="body"/>
+          <p:cNvSpPr txBox="1"/>
+          <p:nvPr/>
+        </p:nvSpPr>
+        <p:spPr>
+          <a:xfrm>
+            <a:off x="720000" y="3660000"/>
+            <a:ext cx="10752000" cy="2398000"/>
+          </a:xfrm>
+          <a:prstGeom prst="rect">
+            <a:avLst/>
+          </a:prstGeom>
+          <a:noFill/>
+        </p:spPr>
+        <p:txBody>
+          <a:bodyPr wrap="square" anchor="t">
+            <a:normAutofit/>
+          </a:bodyPr>
+          <a:lstStyle/>
+          <a:p>
+            <a:pPr lvl="0" marL="320000" indent="-320000" algn="l">
+              <a:lnSpc>
+                <a:spcPct val="118000"/>
+              </a:lnSpc>
+              <a:spcBef>
+                <a:spcPts val="340"/>
+              </a:spcBef>
+              <a:buFont typeface="Arial"/>
+              <a:buChar char="▪"/>
+            </a:pPr>
+            <a:r>
+              <a:rPr lang="zh-CN" altLang="en-US" sz="1900" b="1" dirty="0">
+                <a:solidFill>
+                  <a:srgbClr val="1B1F24"/>
+                </a:solidFill>
+                <a:latin typeface="Segoe UI"/>
+                <a:ea typeface="微软雅黑"/>
+              </a:rPr>
+              <a:t>明确不跟的两件事</a:t>
+            </a:r>
+            <a:r>
+              <a:rPr lang="zh-CN" altLang="en-US" sz="1900" dirty="0">
+                <a:solidFill>
+                  <a:srgbClr val="1B1F24"/>
+                </a:solidFill>
+                <a:latin typeface="Segoe UI"/>
+                <a:ea typeface="微软雅黑"/>
+              </a:rPr>
+              <a:t>：不做无限制工具调用（SSH/邮件/IM 群发）——教学系统碰的是学生数据，没有明确授权前不扩大攻击面；不做「AI 自己觉得学会了就自动上线新技能」——技能资产必须经教师确认才能进复用库，这是第 4 页「宁缺毋滥」原则的自然延伸，不是新规矩。</a:t>
+            </a:r>
+          </a:p>
+          <a:p>
+            <a:pPr lvl="0" marL="320000" indent="-320000" algn="l">
+              <a:lnSpc>
+                <a:spcPct val="118000"/>
+              </a:lnSpc>
+              <a:spcBef>
+                <a:spcPts val="340"/>
+              </a:spcBef>
+              <a:buFont typeface="Arial"/>
+              <a:buChar char="▪"/>
+            </a:pPr>
+            <a:r>
+              <a:rPr lang="zh-CN" altLang="en-US" sz="1900" b="1" dirty="0">
+                <a:solidFill>
+                  <a:srgbClr val="1B1F24"/>
+                </a:solidFill>
+                <a:latin typeface="Segoe UI"/>
+                <a:ea typeface="微软雅黑"/>
+              </a:rPr>
+              <a:t>这四件事没有一件需要推翻现有架构</a:t>
+            </a:r>
+            <a:r>
+              <a:rPr lang="zh-CN" altLang="en-US" sz="1900" dirty="0">
+                <a:solidFill>
+                  <a:srgbClr val="1B1F24"/>
+                </a:solidFill>
+                <a:latin typeface="Segoe UI"/>
+                <a:ea typeface="微软雅黑"/>
+              </a:rPr>
+              <a:t>——全部是在 plan()/express() 二段式、事件流只追加这两条已有铁律基础上做扩展。</a:t>
+            </a:r>
+            <a:r>
+              <a:rPr lang="zh-CN" altLang="en-US" sz="1900" b="1" dirty="0">
+                <a:solidFill>
+                  <a:srgbClr val="1B1F24"/>
+                </a:solidFill>
+                <a:latin typeface="Segoe UI"/>
+                <a:ea typeface="微软雅黑"/>
+              </a:rPr>
+              <a:t>这也是「完全有能力建」的根据</a:t>
+            </a:r>
+            <a:r>
+              <a:rPr lang="zh-CN" altLang="en-US" sz="1900" dirty="0">
+                <a:solidFill>
+                  <a:srgbClr val="1B1F24"/>
+                </a:solidFill>
+                <a:latin typeface="Segoe UI"/>
+                <a:ea typeface="微软雅黑"/>
+              </a:rPr>
+              <a:t>：不是从零开始追热点，是把已经验证过的地基继续往上砌。</a:t>
+            </a:r>
+          </a:p>
+        </p:txBody>
+      </p:sp>
+      <p:sp>
+        <p:nvSpPr>
+          <p:cNvPr id="12" name="r12"/>
+          <p:cNvSpPr/>
+          <p:nvPr/>
+        </p:nvSpPr>
+        <p:spPr>
+          <a:xfrm>
+            <a:off x="720000" y="5958000"/>
+            <a:ext cx="10752000" cy="460000"/>
+          </a:xfrm>
+          <a:prstGeom prst="roundRect">
+            <a:avLst>
+              <a:gd name="adj" fmla="val 6000"/>
+            </a:avLst>
+          </a:prstGeom>
+          <a:solidFill>
+            <a:srgbClr val="BF8700">
+              <a:alpha val="10000"/>
+            </a:srgbClr>
+          </a:solidFill>
+          <a:ln>
+            <a:noFill/>
+          </a:ln>
+        </p:spPr>
+        <p:txBody>
+          <a:bodyPr/>
+          <a:lstStyle/>
+          <a:p/>
+        </p:txBody>
+      </p:sp>
+      <p:sp>
+        <p:nvSpPr>
+          <p:cNvPr id="13" name="note"/>
+          <p:cNvSpPr txBox="1"/>
+          <p:nvPr/>
+        </p:nvSpPr>
+        <p:spPr>
+          <a:xfrm>
+            <a:off x="920000" y="5998000"/>
+            <a:ext cx="10352000" cy="400000"/>
+          </a:xfrm>
+          <a:prstGeom prst="rect">
+            <a:avLst/>
+          </a:prstGeom>
+          <a:noFill/>
+        </p:spPr>
+        <p:txBody>
+          <a:bodyPr wrap="square" anchor="t">
+            <a:normAutofit/>
+          </a:bodyPr>
+          <a:lstStyle/>
+          <a:p>
+            <a:pPr lvl="0" marL="0" indent="0" algn="l">
+              <a:lnSpc>
+                <a:spcPct val="118000"/>
+              </a:lnSpc>
+              <a:spcBef>
+                <a:spcPts val="0"/>
+              </a:spcBef>
+              <a:buNone/>
+            </a:pPr>
+            <a:r>
+              <a:rPr lang="zh-CN" altLang="en-US" sz="1400" dirty="0">
+                <a:solidFill>
+                  <a:srgbClr val="8A6400"/>
+                </a:solidFill>
+                <a:latin typeface="Segoe UI"/>
+                <a:ea typeface="微软雅黑"/>
+              </a:rPr>
+              <a:t>这两页不是承诺具体上线时间——是想让各位看到：这套架构留了足够的余量去接住下一步的技术潮流，不需要推倒重来。</a:t>
+            </a:r>
+          </a:p>
+        </p:txBody>
+      </p:sp>
+      <p:sp>
+        <p:nvSpPr>
+          <p:cNvPr id="90" name="pg"/>
+          <p:cNvSpPr txBox="1"/>
+          <p:nvPr/>
+        </p:nvSpPr>
+        <p:spPr>
+          <a:xfrm>
+            <a:off x="10572000" y="6378000"/>
+            <a:ext cx="900000" cy="300000"/>
+          </a:xfrm>
+          <a:prstGeom prst="rect">
+            <a:avLst/>
+          </a:prstGeom>
+          <a:noFill/>
+        </p:spPr>
+        <p:txBody>
+          <a:bodyPr wrap="square" anchor="t">
+            <a:normAutofit/>
+          </a:bodyPr>
+          <a:lstStyle/>
+          <a:p>
+            <a:pPr lvl="0" marL="0" indent="0" algn="r">
+              <a:lnSpc>
+                <a:spcPct val="118000"/>
+              </a:lnSpc>
+              <a:spcBef>
+                <a:spcPts val="0"/>
+              </a:spcBef>
+              <a:buNone/>
+            </a:pPr>
+            <a:r>
+              <a:rPr lang="zh-CN" altLang="en-US" sz="1100" dirty="0">
+                <a:solidFill>
+                  <a:srgbClr val="6B7280"/>
+                </a:solidFill>
+                <a:latin typeface="Segoe UI"/>
+                <a:ea typeface="微软雅黑"/>
+              </a:rPr>
+              <a:t>14 / 15</a:t>
+            </a:r>
+          </a:p>
+        </p:txBody>
+      </p:sp>
+    </p:spTree>
+  </p:cSld>
+  <p:clrMapOvr>
+    <a:overrideClrMapping bg1="lt1" tx1="dk1" bg2="lt2" tx2="dk2" accent1="accent1" accent2="accent2" accent3="accent3" accent4="accent4" accent5="accent5" accent6="accent6" hlink="hlink" folHlink="folHlink"/>
+  </p:clrMapOvr>
+</p:sld>
+</file>
+
+<file path=ppt/slides/slide15.xml><?xml version="1.0" encoding="utf-8"?>
+<p:sld xmlns:a="http://schemas.openxmlformats.org/drawingml/2006/main" xmlns:r="http://schemas.openxmlformats.org/officeDocument/2006/relationships" xmlns:p="http://schemas.openxmlformats.org/presentationml/2006/main">
+  <p:cSld>
+    <p:spTree>
+      <p:nvGrpSpPr>
+        <p:cNvPr id="1" name=""/>
+        <p:cNvGrpSpPr/>
+        <p:nvPr/>
+      </p:nvGrpSpPr>
+      <p:grpSpPr>
+        <a:xfrm>
+          <a:off x="0" y="0"/>
+          <a:ext cx="0" cy="0"/>
+          <a:chOff x="0" y="0"/>
+          <a:chExt cx="0" cy="0"/>
+        </a:xfrm>
+      </p:grpSpPr>
+      <p:sp>
+        <p:nvSpPr>
+          <p:cNvPr id="2" name="r2"/>
+          <p:cNvSpPr/>
+          <p:nvPr/>
+        </p:nvSpPr>
+        <p:spPr>
+          <a:xfrm>
+            <a:off x="720000" y="660000"/>
+            <a:ext cx="90000" cy="420000"/>
+          </a:xfrm>
+          <a:prstGeom prst="roundRect">
+            <a:avLst>
+              <a:gd name="adj" fmla="val 6000"/>
+            </a:avLst>
+          </a:prstGeom>
+          <a:solidFill>
+            <a:srgbClr val="1F6FEB">
+              <a:alpha val="100000"/>
+            </a:srgbClr>
+          </a:solidFill>
+          <a:ln>
+            <a:noFill/>
+          </a:ln>
+        </p:spPr>
+        <p:txBody>
+          <a:bodyPr/>
+          <a:lstStyle/>
+          <a:p/>
+        </p:txBody>
+      </p:sp>
+      <p:sp>
+        <p:nvSpPr>
+          <p:cNvPr id="3" name="title"/>
+          <p:cNvSpPr txBox="1"/>
+          <p:nvPr/>
+        </p:nvSpPr>
+        <p:spPr>
+          <a:xfrm>
+            <a:off x="940000" y="620000"/>
+            <a:ext cx="10752000" cy="620000"/>
+          </a:xfrm>
+          <a:prstGeom prst="rect">
+            <a:avLst/>
+          </a:prstGeom>
+          <a:noFill/>
+        </p:spPr>
+        <p:txBody>
+          <a:bodyPr wrap="square" anchor="t">
+            <a:normAutofit/>
+          </a:bodyPr>
+          <a:lstStyle/>
+          <a:p>
+            <a:pPr lvl="0" marL="0" indent="0" algn="l">
+              <a:lnSpc>
+                <a:spcPct val="118000"/>
+              </a:lnSpc>
+              <a:spcBef>
+                <a:spcPts val="0"/>
+              </a:spcBef>
+              <a:buNone/>
+            </a:pPr>
+            <a:r>
+              <a:rPr lang="zh-CN" altLang="en-US" sz="2700" b="1" dirty="0">
+                <a:solidFill>
+                  <a:srgbClr val="1B1F24"/>
+                </a:solidFill>
+                <a:latin typeface="Segoe UI"/>
+                <a:ea typeface="微软雅黑"/>
+              </a:rPr>
+              <a:t>恳请各位拍板，以及下一步</a:t>
+            </a:r>
+          </a:p>
+        </p:txBody>
+      </p:sp>
+      <p:sp>
+        <p:nvSpPr>
+          <p:cNvPr id="4" name="sub"/>
+          <p:cNvSpPr txBox="1"/>
+          <p:nvPr/>
+        </p:nvSpPr>
+        <p:spPr>
+          <a:xfrm>
+            <a:off x="940000" y="1180000"/>
+            <a:ext cx="10752000" cy="460000"/>
+          </a:xfrm>
+          <a:prstGeom prst="rect">
+            <a:avLst/>
+          </a:prstGeom>
+          <a:noFill/>
+        </p:spPr>
+        <p:txBody>
+          <a:bodyPr wrap="square" anchor="t">
+            <a:normAutofit/>
+          </a:bodyPr>
+          <a:lstStyle/>
+          <a:p>
+            <a:pPr lvl="0" marL="0" indent="0" algn="l">
+              <a:lnSpc>
+                <a:spcPct val="118000"/>
+              </a:lnSpc>
+              <a:spcBef>
+                <a:spcPts val="0"/>
+              </a:spcBef>
+              <a:buNone/>
+            </a:pPr>
+            <a:r>
+              <a:rPr lang="zh-CN" altLang="en-US" sz="1500" dirty="0">
+                <a:solidFill>
+                  <a:srgbClr val="6B7280"/>
+                </a:solidFill>
+                <a:latin typeface="Segoe UI"/>
+                <a:ea typeface="微软雅黑"/>
+              </a:rPr>
+              <a:t>参数已全部做成配置，但初值需要教学经验给定</a:t>
+            </a:r>
+          </a:p>
+        </p:txBody>
+      </p:sp>
+      <p:graphicFrame>
+        <p:nvGraphicFramePr>
+          <p:cNvPr id="10" name="t10"/>
+          <p:cNvGraphicFramePr/>
+          <p:nvPr/>
+        </p:nvGraphicFramePr>
+        <p:xfrm>
+          <a:off x="720000" y="1700000"/>
+          <a:ext cx="10752000" cy="2400000"/>
+        </p:xfrm>
+        <a:graphic>
+          <a:graphicData uri="http://schemas.openxmlformats.org/drawingml/2006/table">
+            <a:tbl>
+              <a:tblPr firstRow="1"/>
+              <a:tblGrid>
+                <a:gridCol w="7751441"/>
+                <a:gridCol w="3000558"/>
+              </a:tblGrid>
+              <a:tr h="400000">
+                <a:tc>
+                  <a:txBody>
+                    <a:bodyPr/>
+                    <a:lstStyle/>
+                    <a:p>
+                      <a:pPr lvl="0" marL="0" indent="0" algn="l">
+                        <a:lnSpc>
+                          <a:spcPct val="118000"/>
+                        </a:lnSpc>
+                        <a:spcBef>
+                          <a:spcPts val="0"/>
+                        </a:spcBef>
+                        <a:buNone/>
+                      </a:pPr>
+                      <a:r>
+                        <a:rPr lang="zh-CN" altLang="en-US" sz="1500" b="1" dirty="0">
+                          <a:solidFill>
+                            <a:srgbClr val="1B1F24"/>
+                          </a:solidFill>
+                          <a:latin typeface="Segoe UI"/>
+                          <a:ea typeface="微软雅黑"/>
+                        </a:rPr>
+                        <a:t>需要各位定的</a:t>
+                      </a:r>
+                    </a:p>
+                  </a:txBody>
+                  <a:tcPr marL="91440" marR="91440" marT="45720" marB="45720" anchor="ctr">
+                    <a:lnB w="6350">
+                      <a:solidFill>
+                        <a:srgbClr val="E5E7EB"/>
+                      </a:solidFill>
+                    </a:lnB>
+                    <a:solidFill>
+                      <a:srgbClr val="F2F5F9"/>
+                    </a:solidFill>
+                  </a:tcPr>
+                </a:tc>
+                <a:tc>
+                  <a:txBody>
+                    <a:bodyPr/>
+                    <a:lstStyle/>
+                    <a:p>
+                      <a:pPr lvl="0" marL="0" indent="0" algn="l">
+                        <a:lnSpc>
+                          <a:spcPct val="118000"/>
+                        </a:lnSpc>
+                        <a:spcBef>
+                          <a:spcPts val="0"/>
+                        </a:spcBef>
+                        <a:buNone/>
+                      </a:pPr>
+                      <a:r>
+                        <a:rPr lang="zh-CN" altLang="en-US" sz="1500" b="1" dirty="0">
+                          <a:solidFill>
+                            <a:srgbClr val="1B1F24"/>
+                          </a:solidFill>
+                          <a:latin typeface="Segoe UI"/>
+                          <a:ea typeface="微软雅黑"/>
+                        </a:rPr>
+                        <a:t>当前初值</a:t>
+                      </a:r>
+                    </a:p>
+                  </a:txBody>
+                  <a:tcPr marL="91440" marR="91440" marT="45720" marB="45720" anchor="ctr">
+                    <a:lnB w="6350">
+                      <a:solidFill>
+                        <a:srgbClr val="E5E7EB"/>
+                      </a:solidFill>
+                    </a:lnB>
+                    <a:solidFill>
+                      <a:srgbClr val="F2F5F9"/>
+                    </a:solidFill>
+                  </a:tcPr>
+                </a:tc>
+              </a:tr>
+              <a:tr h="400000">
+                <a:tc>
+                  <a:txBody>
+                    <a:bodyPr/>
+                    <a:lstStyle/>
+                    <a:p>
+                      <a:pPr lvl="0" marL="0" indent="0" algn="l">
+                        <a:lnSpc>
+                          <a:spcPct val="118000"/>
+                        </a:lnSpc>
+                        <a:spcBef>
+                          <a:spcPts val="0"/>
+                        </a:spcBef>
+                        <a:buNone/>
+                      </a:pPr>
+                      <a:r>
+                        <a:rPr lang="zh-CN" altLang="en-US" sz="1500" dirty="0">
+                          <a:solidFill>
+                            <a:srgbClr val="333333"/>
+                          </a:solidFill>
+                          <a:latin typeface="Segoe UI"/>
+                          <a:ea typeface="微软雅黑"/>
+                        </a:rPr>
+                        <a:t>知识点拆到多细？一门课 300 还是 500 个？</a:t>
+                      </a:r>
+                    </a:p>
+                  </a:txBody>
+                  <a:tcPr marL="91440" marR="91440" marT="45720" marB="45720" anchor="ctr">
+                    <a:lnB w="6350">
+                      <a:solidFill>
+                        <a:srgbClr val="E5E7EB"/>
+                      </a:solidFill>
+                    </a:lnB>
+                    <a:solidFill>
+                      <a:srgbClr val="FFFFFF"/>
+                    </a:solidFill>
+                  </a:tcPr>
+                </a:tc>
+                <a:tc>
+                  <a:txBody>
+                    <a:bodyPr/>
+                    <a:lstStyle/>
+                    <a:p>
+                      <a:pPr lvl="0" marL="0" indent="0" algn="l">
+                        <a:lnSpc>
+                          <a:spcPct val="118000"/>
+                        </a:lnSpc>
+                        <a:spcBef>
+                          <a:spcPts val="0"/>
+                        </a:spcBef>
+                        <a:buNone/>
+                      </a:pPr>
+                      <a:r>
+                        <a:rPr lang="zh-CN" altLang="en-US" sz="1500" dirty="0">
+                          <a:solidFill>
+                            <a:srgbClr val="333333"/>
+                          </a:solidFill>
+                          <a:latin typeface="Segoe UI"/>
+                          <a:ea typeface="微软雅黑"/>
+                        </a:rPr>
+                        <a:t>183（偏粗）</a:t>
+                      </a:r>
+                    </a:p>
+                  </a:txBody>
+                  <a:tcPr marL="91440" marR="91440" marT="45720" marB="45720" anchor="ctr">
+                    <a:lnB w="6350">
+                      <a:solidFill>
+                        <a:srgbClr val="E5E7EB"/>
+                      </a:solidFill>
+                    </a:lnB>
+                    <a:solidFill>
+                      <a:srgbClr val="FFFFFF"/>
+                    </a:solidFill>
+                  </a:tcPr>
+                </a:tc>
+              </a:tr>
+              <a:tr h="400000">
+                <a:tc>
+                  <a:txBody>
+                    <a:bodyPr/>
+                    <a:lstStyle/>
+                    <a:p>
+                      <a:pPr lvl="0" marL="0" indent="0" algn="l">
+                        <a:lnSpc>
+                          <a:spcPct val="118000"/>
+                        </a:lnSpc>
+                        <a:spcBef>
+                          <a:spcPts val="0"/>
+                        </a:spcBef>
+                        <a:buNone/>
+                      </a:pPr>
+                      <a:r>
+                        <a:rPr lang="zh-CN" altLang="en-US" sz="1500" b="1" dirty="0">
+                          <a:solidFill>
+                            <a:srgbClr val="333333"/>
+                          </a:solidFill>
+                          <a:latin typeface="Segoe UI"/>
+                          <a:ea typeface="微软雅黑"/>
+                        </a:rPr>
+                        <a:t>诊断报告里最想第一时间看到哪几件事？</a:t>
+                      </a:r>
+                    </a:p>
+                  </a:txBody>
+                  <a:tcPr marL="91440" marR="91440" marT="45720" marB="45720" anchor="ctr">
+                    <a:lnB w="6350">
+                      <a:solidFill>
+                        <a:srgbClr val="E5E7EB"/>
+                      </a:solidFill>
+                    </a:lnB>
+                    <a:solidFill>
+                      <a:srgbClr val="FFFFFF"/>
+                    </a:solidFill>
+                  </a:tcPr>
+                </a:tc>
+                <a:tc>
+                  <a:txBody>
+                    <a:bodyPr/>
+                    <a:lstStyle/>
+                    <a:p>
+                      <a:pPr lvl="0" marL="0" indent="0" algn="l">
+                        <a:lnSpc>
+                          <a:spcPct val="118000"/>
+                        </a:lnSpc>
+                        <a:spcBef>
+                          <a:spcPts val="0"/>
+                        </a:spcBef>
+                        <a:buNone/>
+                      </a:pPr>
+                      <a:r>
+                        <a:rPr lang="zh-CN" altLang="en-US" sz="1500" dirty="0">
+                          <a:solidFill>
+                            <a:srgbClr val="333333"/>
+                          </a:solidFill>
+                          <a:latin typeface="Segoe UI"/>
+                          <a:ea typeface="微软雅黑"/>
+                        </a:rPr>
+                        <a:t>六项，可增删</a:t>
+                      </a:r>
+                    </a:p>
+                  </a:txBody>
+                  <a:tcPr marL="91440" marR="91440" marT="45720" marB="45720" anchor="ctr">
+                    <a:lnB w="6350">
+                      <a:solidFill>
+                        <a:srgbClr val="E5E7EB"/>
+                      </a:solidFill>
+                    </a:lnB>
+                    <a:solidFill>
+                      <a:srgbClr val="FFFFFF"/>
+                    </a:solidFill>
+                  </a:tcPr>
+                </a:tc>
+              </a:tr>
+              <a:tr h="400000">
+                <a:tc>
+                  <a:txBody>
+                    <a:bodyPr/>
+                    <a:lstStyle/>
+                    <a:p>
+                      <a:pPr lvl="0" marL="0" indent="0" algn="l">
+                        <a:lnSpc>
+                          <a:spcPct val="118000"/>
+                        </a:lnSpc>
+                        <a:spcBef>
+                          <a:spcPts val="0"/>
+                        </a:spcBef>
+                        <a:buNone/>
+                      </a:pPr>
+                      <a:r>
+                        <a:rPr lang="zh-CN" altLang="en-US" sz="1500" dirty="0">
+                          <a:solidFill>
+                            <a:srgbClr val="333333"/>
+                          </a:solidFill>
+                          <a:latin typeface="Segoe UI"/>
+                          <a:ea typeface="微软雅黑"/>
+                        </a:rPr>
+                        <a:t>掌握度低于多少判定「未掌握」；追问几次后降级</a:t>
+                      </a:r>
+                    </a:p>
+                  </a:txBody>
+                  <a:tcPr marL="91440" marR="91440" marT="45720" marB="45720" anchor="ctr">
+                    <a:lnB w="6350">
+                      <a:solidFill>
+                        <a:srgbClr val="E5E7EB"/>
+                      </a:solidFill>
+                    </a:lnB>
+                    <a:solidFill>
+                      <a:srgbClr val="FFFFFF"/>
+                    </a:solidFill>
+                  </a:tcPr>
+                </a:tc>
+                <a:tc>
+                  <a:txBody>
+                    <a:bodyPr/>
+                    <a:lstStyle/>
+                    <a:p>
+                      <a:pPr lvl="0" marL="0" indent="0" algn="l">
+                        <a:lnSpc>
+                          <a:spcPct val="118000"/>
+                        </a:lnSpc>
+                        <a:spcBef>
+                          <a:spcPts val="0"/>
+                        </a:spcBef>
+                        <a:buNone/>
+                      </a:pPr>
+                      <a:r>
+                        <a:rPr lang="zh-CN" altLang="en-US" sz="1500" dirty="0">
+                          <a:solidFill>
+                            <a:srgbClr val="333333"/>
+                          </a:solidFill>
+                          <a:latin typeface="Segoe UI"/>
+                          <a:ea typeface="微软雅黑"/>
+                        </a:rPr>
+                        <a:t>0.75；3 次</a:t>
+                      </a:r>
+                    </a:p>
+                  </a:txBody>
+                  <a:tcPr marL="91440" marR="91440" marT="45720" marB="45720" anchor="ctr">
+                    <a:lnB w="6350">
+                      <a:solidFill>
+                        <a:srgbClr val="E5E7EB"/>
+                      </a:solidFill>
+                    </a:lnB>
+                    <a:solidFill>
+                      <a:srgbClr val="FFFFFF"/>
+                    </a:solidFill>
+                  </a:tcPr>
+                </a:tc>
+              </a:tr>
+              <a:tr h="400000">
+                <a:tc>
+                  <a:txBody>
+                    <a:bodyPr/>
+                    <a:lstStyle/>
+                    <a:p>
+                      <a:pPr lvl="0" marL="0" indent="0" algn="l">
+                        <a:lnSpc>
+                          <a:spcPct val="118000"/>
+                        </a:lnSpc>
+                        <a:spcBef>
+                          <a:spcPts val="0"/>
+                        </a:spcBef>
+                        <a:buNone/>
+                      </a:pPr>
+                      <a:r>
+                        <a:rPr lang="zh-CN" altLang="en-US" sz="1500" b="1" dirty="0">
+                          <a:solidFill>
+                            <a:srgbClr val="333333"/>
+                          </a:solidFill>
+                          <a:latin typeface="Segoe UI"/>
+                          <a:ea typeface="微软雅黑"/>
+                        </a:rPr>
+                        <a:t>两次做对相隔多少天才算「已验证掌握」</a:t>
+                      </a:r>
+                    </a:p>
+                  </a:txBody>
+                  <a:tcPr marL="91440" marR="91440" marT="45720" marB="45720" anchor="ctr">
+                    <a:lnB w="6350">
+                      <a:solidFill>
+                        <a:srgbClr val="E5E7EB"/>
+                      </a:solidFill>
+                    </a:lnB>
+                    <a:solidFill>
+                      <a:srgbClr val="FFFFFF"/>
+                    </a:solidFill>
+                  </a:tcPr>
+                </a:tc>
+                <a:tc>
+                  <a:txBody>
+                    <a:bodyPr/>
+                    <a:lstStyle/>
+                    <a:p>
+                      <a:pPr lvl="0" marL="0" indent="0" algn="l">
+                        <a:lnSpc>
+                          <a:spcPct val="118000"/>
+                        </a:lnSpc>
+                        <a:spcBef>
+                          <a:spcPts val="0"/>
+                        </a:spcBef>
+                        <a:buNone/>
+                      </a:pPr>
+                      <a:r>
+                        <a:rPr lang="zh-CN" altLang="en-US" sz="1500" dirty="0">
+                          <a:solidFill>
+                            <a:srgbClr val="333333"/>
+                          </a:solidFill>
+                          <a:latin typeface="Segoe UI"/>
+                          <a:ea typeface="微软雅黑"/>
+                        </a:rPr>
+                        <a:t>7 天</a:t>
+                      </a:r>
+                    </a:p>
+                  </a:txBody>
+                  <a:tcPr marL="91440" marR="91440" marT="45720" marB="45720" anchor="ctr">
+                    <a:lnB w="6350">
+                      <a:solidFill>
+                        <a:srgbClr val="E5E7EB"/>
+                      </a:solidFill>
+                    </a:lnB>
+                    <a:solidFill>
+                      <a:srgbClr val="FFFFFF"/>
+                    </a:solidFill>
+                  </a:tcPr>
+                </a:tc>
+              </a:tr>
+              <a:tr h="400000">
+                <a:tc>
+                  <a:txBody>
+                    <a:bodyPr/>
+                    <a:lstStyle/>
+                    <a:p>
+                      <a:pPr lvl="0" marL="0" indent="0" algn="l">
+                        <a:lnSpc>
+                          <a:spcPct val="118000"/>
+                        </a:lnSpc>
+                        <a:spcBef>
+                          <a:spcPts val="0"/>
+                        </a:spcBef>
+                        <a:buNone/>
+                      </a:pPr>
+                      <a:r>
+                        <a:rPr lang="zh-CN" altLang="en-US" sz="1500" dirty="0">
+                          <a:solidFill>
+                            <a:srgbClr val="333333"/>
+                          </a:solidFill>
+                          <a:latin typeface="Segoe UI"/>
+                          <a:ea typeface="微软雅黑"/>
+                        </a:rPr>
+                        <a:t>指导项目时，你凭哪些迹象判断一个学生真的懂了？</a:t>
+                      </a:r>
+                    </a:p>
+                  </a:txBody>
+                  <a:tcPr marL="91440" marR="91440" marT="45720" marB="45720" anchor="ctr">
+                    <a:lnB w="6350">
+                      <a:solidFill>
+                        <a:srgbClr val="E5E7EB"/>
+                      </a:solidFill>
+                    </a:lnB>
+                    <a:solidFill>
+                      <a:srgbClr val="FFFFFF"/>
+                    </a:solidFill>
+                  </a:tcPr>
+                </a:tc>
+                <a:tc>
+                  <a:txBody>
+                    <a:bodyPr/>
+                    <a:lstStyle/>
+                    <a:p>
+                      <a:pPr lvl="0" marL="0" indent="0" algn="l">
+                        <a:lnSpc>
+                          <a:spcPct val="118000"/>
+                        </a:lnSpc>
+                        <a:spcBef>
+                          <a:spcPts val="0"/>
+                        </a:spcBef>
+                        <a:buNone/>
+                      </a:pPr>
+                      <a:r>
+                        <a:rPr lang="zh-CN" altLang="en-US" sz="1500" dirty="0">
+                          <a:solidFill>
+                            <a:srgbClr val="333333"/>
+                          </a:solidFill>
+                          <a:latin typeface="Segoe UI"/>
+                          <a:ea typeface="微软雅黑"/>
+                        </a:rPr>
+                        <a:t>待各位给出</a:t>
+                      </a:r>
+                    </a:p>
+                  </a:txBody>
+                  <a:tcPr marL="91440" marR="91440" marT="45720" marB="45720" anchor="ctr">
+                    <a:lnB w="6350">
+                      <a:solidFill>
+                        <a:srgbClr val="E5E7EB"/>
+                      </a:solidFill>
+                    </a:lnB>
+                    <a:solidFill>
+                      <a:srgbClr val="FFFFFF"/>
+                    </a:solidFill>
+                  </a:tcPr>
+                </a:tc>
+              </a:tr>
+            </a:tbl>
+          </a:graphicData>
+        </a:graphic>
+      </p:graphicFrame>
+      <p:sp>
+        <p:nvSpPr>
+          <p:cNvPr id="11" name="body"/>
+          <p:cNvSpPr txBox="1"/>
+          <p:nvPr/>
+        </p:nvSpPr>
+        <p:spPr>
+          <a:xfrm>
+            <a:off x="720000" y="4360000"/>
+            <a:ext cx="10752000" cy="1698000"/>
+          </a:xfrm>
+          <a:prstGeom prst="rect">
+            <a:avLst/>
+          </a:prstGeom>
+          <a:noFill/>
+        </p:spPr>
+        <p:txBody>
+          <a:bodyPr wrap="square" anchor="t">
+            <a:normAutofit/>
+          </a:bodyPr>
+          <a:lstStyle/>
+          <a:p>
+            <a:pPr lvl="0" marL="320000" indent="-320000" algn="l">
+              <a:lnSpc>
+                <a:spcPct val="118000"/>
+              </a:lnSpc>
+              <a:spcBef>
+                <a:spcPts val="340"/>
+              </a:spcBef>
+              <a:buFont typeface="Arial"/>
+              <a:buChar char="▪"/>
+            </a:pPr>
+            <a:r>
+              <a:rPr lang="zh-CN" altLang="en-US" sz="1900" b="1" dirty="0">
+                <a:solidFill>
+                  <a:srgbClr val="1B1F24"/>
+                </a:solidFill>
+                <a:latin typeface="Segoe UI"/>
+                <a:ea typeface="微软雅黑"/>
+              </a:rPr>
+              <a:t>近期</a:t>
+            </a:r>
+            <a:r>
+              <a:rPr lang="zh-CN" altLang="en-US" sz="1900" dirty="0">
+                <a:solidFill>
+                  <a:srgbClr val="1B1F24"/>
+                </a:solidFill>
+                <a:latin typeface="Segoe UI"/>
+                <a:ea typeface="微软雅黑"/>
+              </a:rPr>
+              <a:t>：试点课程知识点细化到 300–500 个；接入第一门课的真实作业数据；首批 2 个项目的任务-知识点映射由导师确认。</a:t>
+            </a:r>
+          </a:p>
+          <a:p>
+            <a:pPr lvl="0" marL="320000" indent="-320000" algn="l">
+              <a:lnSpc>
+                <a:spcPct val="118000"/>
+              </a:lnSpc>
+              <a:spcBef>
+                <a:spcPts val="340"/>
+              </a:spcBef>
+              <a:buFont typeface="Arial"/>
+              <a:buChar char="▪"/>
+            </a:pPr>
+            <a:r>
+              <a:rPr lang="zh-CN" altLang="en-US" sz="1900" b="1" dirty="0">
+                <a:solidFill>
+                  <a:srgbClr val="1B1F24"/>
+                </a:solidFill>
+                <a:latin typeface="Segoe UI"/>
+                <a:ea typeface="微软雅黑"/>
+              </a:rPr>
+              <a:t>战略</a:t>
+            </a:r>
+            <a:r>
+              <a:rPr lang="zh-CN" altLang="en-US" sz="1900" dirty="0">
+                <a:solidFill>
+                  <a:srgbClr val="1B1F24"/>
+                </a:solidFill>
+                <a:latin typeface="Segoe UI"/>
+                <a:ea typeface="微软雅黑"/>
+              </a:rPr>
+              <a:t>：全球仅极少数教学系统有随机对照试验级证据，中文工科场景近乎空白。从现在起按可发表标准采集——实验班 vs 对照组，</a:t>
+            </a:r>
+            <a:r>
+              <a:rPr lang="zh-CN" altLang="en-US" sz="1900" b="1" dirty="0">
+                <a:solidFill>
+                  <a:srgbClr val="1B1F24"/>
+                </a:solidFill>
+                <a:latin typeface="Segoe UI"/>
+                <a:ea typeface="微软雅黑"/>
+              </a:rPr>
+              <a:t>延迟后测</a:t>
+            </a:r>
+            <a:r>
+              <a:rPr lang="zh-CN" altLang="en-US" sz="1900" dirty="0">
+                <a:solidFill>
+                  <a:srgbClr val="1B1F24"/>
+                </a:solidFill>
+                <a:latin typeface="Segoe UI"/>
+                <a:ea typeface="微软雅黑"/>
+              </a:rPr>
+              <a:t>作主指标。</a:t>
+            </a:r>
+          </a:p>
+          <a:p>
+            <a:pPr lvl="1" marL="320000" indent="-320000" algn="l">
+              <a:lnSpc>
+                <a:spcPct val="118000"/>
+              </a:lnSpc>
+              <a:spcBef>
+                <a:spcPts val="340"/>
+              </a:spcBef>
+              <a:buFont typeface="Arial"/>
+              <a:buChar char="–"/>
+            </a:pPr>
+            <a:r>
+              <a:rPr lang="zh-CN" altLang="en-US" sz="1600" dirty="0">
+                <a:solidFill>
+                  <a:srgbClr val="4A5561"/>
+                </a:solidFill>
+                <a:latin typeface="Segoe UI"/>
+                <a:ea typeface="微软雅黑"/>
+              </a:rPr>
+              <a:t>第 2 页右边那个「1–2 σ」，要靠这件事从理论上限变成本班的实测数字。</a:t>
+            </a:r>
+          </a:p>
+        </p:txBody>
+      </p:sp>
+      <p:sp>
+        <p:nvSpPr>
+          <p:cNvPr id="12" name="r12"/>
+          <p:cNvSpPr/>
+          <p:nvPr/>
+        </p:nvSpPr>
+        <p:spPr>
+          <a:xfrm>
+            <a:off x="720000" y="5958000"/>
+            <a:ext cx="10752000" cy="460000"/>
+          </a:xfrm>
+          <a:prstGeom prst="roundRect">
+            <a:avLst>
+              <a:gd name="adj" fmla="val 6000"/>
+            </a:avLst>
+          </a:prstGeom>
+          <a:solidFill>
+            <a:srgbClr val="BF8700">
+              <a:alpha val="10000"/>
+            </a:srgbClr>
+          </a:solidFill>
+          <a:ln>
+            <a:noFill/>
+          </a:ln>
+        </p:spPr>
+        <p:txBody>
+          <a:bodyPr/>
+          <a:lstStyle/>
+          <a:p/>
+        </p:txBody>
+      </p:sp>
+      <p:sp>
+        <p:nvSpPr>
+          <p:cNvPr id="13" name="note"/>
+          <p:cNvSpPr txBox="1"/>
+          <p:nvPr/>
+        </p:nvSpPr>
+        <p:spPr>
+          <a:xfrm>
+            <a:off x="920000" y="5998000"/>
+            <a:ext cx="10352000" cy="400000"/>
+          </a:xfrm>
+          <a:prstGeom prst="rect">
+            <a:avLst/>
+          </a:prstGeom>
+          <a:noFill/>
+        </p:spPr>
+        <p:txBody>
+          <a:bodyPr wrap="square" anchor="t">
+            <a:normAutofit/>
+          </a:bodyPr>
+          <a:lstStyle/>
+          <a:p>
+            <a:pPr lvl="0" marL="0" indent="0" algn="l">
+              <a:lnSpc>
+                <a:spcPct val="118000"/>
+              </a:lnSpc>
+              <a:spcBef>
+                <a:spcPts val="0"/>
+              </a:spcBef>
+              <a:buNone/>
+            </a:pPr>
+            <a:r>
+              <a:rPr lang="zh-CN" altLang="en-US" sz="1400" dirty="0">
+                <a:solidFill>
+                  <a:srgbClr val="8A6400"/>
+                </a:solidFill>
+                <a:latin typeface="Segoe UI"/>
+                <a:ea typeface="微软雅黑"/>
+              </a:rPr>
+              <a:t>评测指标的选择本身就是架构决策：主指标必须是延迟后测与迁移任务，不能是当场正确率——否则会训练出让学生越学越弱的系统。</a:t>
+            </a:r>
+          </a:p>
+        </p:txBody>
+      </p:sp>
+      <p:sp>
+        <p:nvSpPr>
+          <p:cNvPr id="90" name="pg"/>
+          <p:cNvSpPr txBox="1"/>
+          <p:nvPr/>
+        </p:nvSpPr>
+        <p:spPr>
+          <a:xfrm>
+            <a:off x="10572000" y="6378000"/>
+            <a:ext cx="900000" cy="300000"/>
+          </a:xfrm>
+          <a:prstGeom prst="rect">
+            <a:avLst/>
+          </a:prstGeom>
+          <a:noFill/>
+        </p:spPr>
+        <p:txBody>
+          <a:bodyPr wrap="square" anchor="t">
+            <a:normAutofit/>
+          </a:bodyPr>
+          <a:lstStyle/>
+          <a:p>
+            <a:pPr lvl="0" marL="0" indent="0" algn="r">
+              <a:lnSpc>
+                <a:spcPct val="118000"/>
+              </a:lnSpc>
+              <a:spcBef>
+                <a:spcPts val="0"/>
+              </a:spcBef>
+              <a:buNone/>
+            </a:pPr>
+            <a:r>
+              <a:rPr lang="zh-CN" altLang="en-US" sz="1100" dirty="0">
+                <a:solidFill>
+                  <a:srgbClr val="6B7280"/>
+                </a:solidFill>
+                <a:latin typeface="Segoe UI"/>
+                <a:ea typeface="微软雅黑"/>
+              </a:rPr>
+              <a:t>15 / 15</a:t>
             </a:r>
           </a:p>
         </p:txBody>
@@ -4216,7 +5761,7 @@
                 <a:latin typeface="Segoe UI"/>
                 <a:ea typeface="微软雅黑"/>
               </a:rPr>
-              <a:t>大纲 · 授课计划 · 教案 · 试卷 · 实验任务书</a:t>
+              <a:t>大纲 · 授课计划 · 课件已经能一键生成——教案 · 试卷排期中</a:t>
             </a:r>
           </a:p>
           <a:p>
@@ -4237,7 +5782,7 @@
                 <a:latin typeface="Segoe UI"/>
                 <a:ea typeface="微软雅黑"/>
               </a:rPr>
-              <a:t>由系统生成，教师从「写」变成「审」</a:t>
+              <a:t>教师从「写」变成「审」：一句话让 AI 改写，教师确认才算数</a:t>
             </a:r>
           </a:p>
           <a:p>
@@ -4593,7 +6138,7 @@
                 <a:latin typeface="Segoe UI"/>
                 <a:ea typeface="微软雅黑"/>
               </a:rPr>
-              <a:t>2 / 13</a:t>
+              <a:t>2 / 15</a:t>
             </a:r>
           </a:p>
         </p:txBody>
@@ -5417,7 +6962,7 @@
                 <a:latin typeface="Segoe UI"/>
                 <a:ea typeface="微软雅黑"/>
               </a:rPr>
-              <a:t>3 / 13</a:t>
+              <a:t>3 / 15</a:t>
             </a:r>
           </a:p>
         </p:txBody>
@@ -6187,7 +7732,7 @@
                 <a:latin typeface="Segoe UI"/>
                 <a:ea typeface="微软雅黑"/>
               </a:rPr>
-              <a:t>4 / 13</a:t>
+              <a:t>4 / 15</a:t>
             </a:r>
           </a:p>
         </p:txBody>
@@ -7232,7 +8777,7 @@
                 <a:latin typeface="Segoe UI"/>
                 <a:ea typeface="微软雅黑"/>
               </a:rPr>
-              <a:t>5 / 13</a:t>
+              <a:t>5 / 15</a:t>
             </a:r>
           </a:p>
         </p:txBody>
@@ -7873,7 +9418,7 @@
                 <a:latin typeface="Segoe UI"/>
                 <a:ea typeface="微软雅黑"/>
               </a:rPr>
-              <a:t>6 / 13</a:t>
+              <a:t>6 / 15</a:t>
             </a:r>
           </a:p>
         </p:txBody>
@@ -8767,7 +10312,7 @@
                 <a:latin typeface="Segoe UI"/>
                 <a:ea typeface="微软雅黑"/>
               </a:rPr>
-              <a:t>7 / 13</a:t>
+              <a:t>7 / 15</a:t>
             </a:r>
           </a:p>
         </p:txBody>
@@ -9146,7 +10691,7 @@
                 <a:latin typeface="Segoe UI"/>
                 <a:ea typeface="微软雅黑"/>
               </a:rPr>
-              <a:t>8 / 13</a:t>
+              <a:t>8 / 15</a:t>
             </a:r>
           </a:p>
         </p:txBody>
@@ -9820,7 +11365,7 @@
                 <a:latin typeface="Segoe UI"/>
                 <a:ea typeface="微软雅黑"/>
               </a:rPr>
-              <a:t>67 个达标点里，只有 24 个经得起隔周再考（验证率 36%）</a:t>
+              <a:t>0 个达标点里，只有 0 个经得起隔周再考（验证率 0%）</a:t>
             </a:r>
             <a:r>
               <a:rPr lang="zh-CN" altLang="en-US" sz="1900" dirty="0">
@@ -9830,7 +11375,7 @@
                 <a:latin typeface="Segoe UI"/>
                 <a:ea typeface="微软雅黑"/>
               </a:rPr>
-              <a:t>，另有 50 个已掉到复检线以下。这个数字本身，就是对「达标即掌握」的一次证伪。</a:t>
+              <a:t>，另有 0 个已掉到复检线以下。这个数字本身，就是对「达标即掌握」的一次证伪。</a:t>
             </a:r>
           </a:p>
           <a:p>
@@ -9981,7 +11526,7 @@
                 <a:latin typeface="Segoe UI"/>
                 <a:ea typeface="微软雅黑"/>
               </a:rPr>
-              <a:t>9 / 13</a:t>
+              <a:t>9 / 15</a:t>
             </a:r>
           </a:p>
         </p:txBody>

--- a/docs/slides/院长实验班AI教学系统_汇报.pptx
+++ b/docs/slides/院长实验班AI教学系统_汇报.pptx
@@ -1293,7 +1293,7 @@
                           <a:latin typeface="Segoe UI"/>
                           <a:ea typeface="微软雅黑"/>
                         </a:rPr>
-                        <a:t>183 / 224</a:t>
+                        <a:t>284 / 332</a:t>
                       </a:r>
                     </a:p>
                   </a:txBody>
@@ -1406,7 +1406,7 @@
                           <a:latin typeface="Segoe UI"/>
                           <a:ea typeface="微软雅黑"/>
                         </a:rPr>
-                        <a:t>2 / 35 / 115</a:t>
+                        <a:t>3 / 76 / 269</a:t>
                       </a:r>
                     </a:p>
                   </a:txBody>
@@ -1519,7 +1519,7 @@
                           <a:latin typeface="Segoe UI"/>
                           <a:ea typeface="微软雅黑"/>
                         </a:rPr>
-                        <a:t>0 人 / 0 条</a:t>
+                        <a:t>60 人 / 5021 条</a:t>
                       </a:r>
                     </a:p>
                   </a:txBody>
@@ -1642,7 +1642,7 @@
                           <a:latin typeface="Segoe UI"/>
                           <a:ea typeface="微软雅黑"/>
                         </a:rPr>
-                        <a:t>0 / 0</a:t>
+                        <a:t>8 / 57</a:t>
                       </a:r>
                     </a:p>
                   </a:txBody>
@@ -1755,7 +1755,7 @@
                           <a:latin typeface="Segoe UI"/>
                           <a:ea typeface="微软雅黑"/>
                         </a:rPr>
-                        <a:t>0 条</a:t>
+                        <a:t>1883 条</a:t>
                       </a:r>
                     </a:p>
                   </a:txBody>
@@ -4918,7 +4918,7 @@
                           <a:latin typeface="Segoe UI"/>
                           <a:ea typeface="微软雅黑"/>
                         </a:rPr>
-                        <a:t>183（偏粗）</a:t>
+                        <a:t>284（偏粗）</a:t>
                       </a:r>
                     </a:p>
                   </a:txBody>
@@ -8965,8 +8965,8 @@
         </p:nvSpPr>
         <p:spPr>
           <a:xfrm>
-            <a:off x="940000" y="1850000"/>
-            <a:ext cx="4736000" cy="1620000"/>
+            <a:off x="920000" y="1850000"/>
+            <a:ext cx="4776000" cy="1620000"/>
           </a:xfrm>
           <a:prstGeom prst="rect">
             <a:avLst/>
@@ -9128,8 +9128,8 @@
         </p:nvSpPr>
         <p:spPr>
           <a:xfrm>
-            <a:off x="6516000" y="1850000"/>
-            <a:ext cx="4736000" cy="1620000"/>
+            <a:off x="6496000" y="1850000"/>
+            <a:ext cx="4776000" cy="1620000"/>
           </a:xfrm>
           <a:prstGeom prst="rect">
             <a:avLst/>
@@ -9260,8 +9260,8 @@
         </p:nvSpPr>
         <p:spPr>
           <a:xfrm>
-            <a:off x="720000" y="3420000"/>
-            <a:ext cx="10752000" cy="2638000"/>
+            <a:off x="720000" y="3480000"/>
+            <a:ext cx="10752000" cy="2578000"/>
           </a:xfrm>
           <a:prstGeom prst="rect">
             <a:avLst/>
@@ -9374,7 +9374,7 @@
                 <a:latin typeface="Segoe UI"/>
                 <a:ea typeface="微软雅黑"/>
               </a:rPr>
-              <a:t>（当前 115 条），由导师标注、不由大模型生成——它是学分认定与能力追溯的依据。</a:t>
+              <a:t>（当前 269 条），由导师标注、不由大模型生成——它是学分认定与能力追溯的依据。</a:t>
             </a:r>
           </a:p>
         </p:txBody>
@@ -10456,7 +10456,7 @@
                 <a:latin typeface="Segoe UI"/>
                 <a:ea typeface="微软雅黑"/>
               </a:rPr>
-              <a:t>183 个知识点、224 条依赖边在三维空间里展开；点一个薄弱点按【根因回溯】，系统沿依赖边把整条链点亮并框住镜头</a:t>
+              <a:t>284 个知识点、332 条依赖边在三维空间里展开；点一个薄弱点按【根因回溯】，系统沿依赖边把整条链点亮并框住镜头</a:t>
             </a:r>
           </a:p>
         </p:txBody>
@@ -11365,7 +11365,7 @@
                 <a:latin typeface="Segoe UI"/>
                 <a:ea typeface="微软雅黑"/>
               </a:rPr>
-              <a:t>0 个达标点里，只有 0 个经得起隔周再考（验证率 0%）</a:t>
+              <a:t>104 个达标点里，只有 39 个经得起隔周再考（验证率 38%）</a:t>
             </a:r>
             <a:r>
               <a:rPr lang="zh-CN" altLang="en-US" sz="1900" dirty="0">
@@ -11375,7 +11375,7 @@
                 <a:latin typeface="Segoe UI"/>
                 <a:ea typeface="微软雅黑"/>
               </a:rPr>
-              <a:t>，另有 0 个已掉到复检线以下。这个数字本身，就是对「达标即掌握」的一次证伪。</a:t>
+              <a:t>，另有 64 个已掉到复检线以下。这个数字本身，就是对「达标即掌握」的一次证伪。</a:t>
             </a:r>
           </a:p>
           <a:p>

--- a/docs/slides/院长实验班AI教学系统_汇报.pptx
+++ b/docs/slides/院长实验班AI教学系统_汇报.pptx
@@ -11365,7 +11365,7 @@
                 <a:latin typeface="Segoe UI"/>
                 <a:ea typeface="微软雅黑"/>
               </a:rPr>
-              <a:t>104 个达标点里，只有 39 个经得起隔周再考（验证率 38%）</a:t>
+              <a:t>0 个达标点里，只有 0 个经得起隔周再考（验证率 0%）</a:t>
             </a:r>
             <a:r>
               <a:rPr lang="zh-CN" altLang="en-US" sz="1900" dirty="0">
@@ -11375,7 +11375,7 @@
                 <a:latin typeface="Segoe UI"/>
                 <a:ea typeface="微软雅黑"/>
               </a:rPr>
-              <a:t>，另有 64 个已掉到复检线以下。这个数字本身，就是对「达标即掌握」的一次证伪。</a:t>
+              <a:t>，另有 0 个已掉到复检线以下。这个数字本身，就是对「达标即掌握」的一次证伪。</a:t>
             </a:r>
           </a:p>
           <a:p>
